--- a/Lecture_Slides/PH 123 Lecture 05.pptx
+++ b/Lecture_Slides/PH 123 Lecture 05.pptx
@@ -5,7 +5,7 @@
     <p:sldMasterId id="2147483648" r:id="rId1"/>
   </p:sldMasterIdLst>
   <p:notesMasterIdLst>
-    <p:notesMasterId r:id="rId90"/>
+    <p:notesMasterId r:id="rId91"/>
   </p:notesMasterIdLst>
   <p:sldIdLst>
     <p:sldId id="345" r:id="rId2"/>
@@ -21,81 +21,82 @@
     <p:sldId id="311" r:id="rId12"/>
     <p:sldId id="290" r:id="rId13"/>
     <p:sldId id="312" r:id="rId14"/>
-    <p:sldId id="291" r:id="rId15"/>
-    <p:sldId id="321" r:id="rId16"/>
-    <p:sldId id="323" r:id="rId17"/>
-    <p:sldId id="354" r:id="rId18"/>
-    <p:sldId id="324" r:id="rId19"/>
-    <p:sldId id="325" r:id="rId20"/>
-    <p:sldId id="326" r:id="rId21"/>
-    <p:sldId id="355" r:id="rId22"/>
-    <p:sldId id="356" r:id="rId23"/>
-    <p:sldId id="357" r:id="rId24"/>
-    <p:sldId id="358" r:id="rId25"/>
-    <p:sldId id="359" r:id="rId26"/>
-    <p:sldId id="348" r:id="rId27"/>
-    <p:sldId id="349" r:id="rId28"/>
-    <p:sldId id="350" r:id="rId29"/>
-    <p:sldId id="351" r:id="rId30"/>
-    <p:sldId id="352" r:id="rId31"/>
-    <p:sldId id="353" r:id="rId32"/>
-    <p:sldId id="360" r:id="rId33"/>
-    <p:sldId id="361" r:id="rId34"/>
-    <p:sldId id="303" r:id="rId35"/>
-    <p:sldId id="328" r:id="rId36"/>
-    <p:sldId id="329" r:id="rId37"/>
-    <p:sldId id="330" r:id="rId38"/>
-    <p:sldId id="331" r:id="rId39"/>
-    <p:sldId id="369" r:id="rId40"/>
-    <p:sldId id="370" r:id="rId41"/>
-    <p:sldId id="332" r:id="rId42"/>
-    <p:sldId id="333" r:id="rId43"/>
-    <p:sldId id="334" r:id="rId44"/>
-    <p:sldId id="335" r:id="rId45"/>
-    <p:sldId id="304" r:id="rId46"/>
-    <p:sldId id="368" r:id="rId47"/>
-    <p:sldId id="305" r:id="rId48"/>
-    <p:sldId id="306" r:id="rId49"/>
-    <p:sldId id="307" r:id="rId50"/>
-    <p:sldId id="308" r:id="rId51"/>
-    <p:sldId id="309" r:id="rId52"/>
-    <p:sldId id="261" r:id="rId53"/>
-    <p:sldId id="262" r:id="rId54"/>
-    <p:sldId id="263" r:id="rId55"/>
-    <p:sldId id="265" r:id="rId56"/>
-    <p:sldId id="363" r:id="rId57"/>
-    <p:sldId id="364" r:id="rId58"/>
-    <p:sldId id="259" r:id="rId59"/>
-    <p:sldId id="264" r:id="rId60"/>
-    <p:sldId id="365" r:id="rId61"/>
-    <p:sldId id="366" r:id="rId62"/>
-    <p:sldId id="266" r:id="rId63"/>
-    <p:sldId id="346" r:id="rId64"/>
-    <p:sldId id="362" r:id="rId65"/>
-    <p:sldId id="286" r:id="rId66"/>
-    <p:sldId id="292" r:id="rId67"/>
-    <p:sldId id="313" r:id="rId68"/>
-    <p:sldId id="293" r:id="rId69"/>
-    <p:sldId id="294" r:id="rId70"/>
-    <p:sldId id="295" r:id="rId71"/>
-    <p:sldId id="296" r:id="rId72"/>
-    <p:sldId id="297" r:id="rId73"/>
-    <p:sldId id="298" r:id="rId74"/>
-    <p:sldId id="314" r:id="rId75"/>
-    <p:sldId id="315" r:id="rId76"/>
-    <p:sldId id="316" r:id="rId77"/>
-    <p:sldId id="317" r:id="rId78"/>
-    <p:sldId id="299" r:id="rId79"/>
-    <p:sldId id="300" r:id="rId80"/>
-    <p:sldId id="301" r:id="rId81"/>
-    <p:sldId id="302" r:id="rId82"/>
-    <p:sldId id="336" r:id="rId83"/>
-    <p:sldId id="337" r:id="rId84"/>
-    <p:sldId id="342" r:id="rId85"/>
-    <p:sldId id="343" r:id="rId86"/>
-    <p:sldId id="339" r:id="rId87"/>
-    <p:sldId id="340" r:id="rId88"/>
-    <p:sldId id="284" r:id="rId89"/>
+    <p:sldId id="371" r:id="rId15"/>
+    <p:sldId id="291" r:id="rId16"/>
+    <p:sldId id="321" r:id="rId17"/>
+    <p:sldId id="323" r:id="rId18"/>
+    <p:sldId id="354" r:id="rId19"/>
+    <p:sldId id="324" r:id="rId20"/>
+    <p:sldId id="325" r:id="rId21"/>
+    <p:sldId id="326" r:id="rId22"/>
+    <p:sldId id="355" r:id="rId23"/>
+    <p:sldId id="356" r:id="rId24"/>
+    <p:sldId id="357" r:id="rId25"/>
+    <p:sldId id="358" r:id="rId26"/>
+    <p:sldId id="359" r:id="rId27"/>
+    <p:sldId id="348" r:id="rId28"/>
+    <p:sldId id="349" r:id="rId29"/>
+    <p:sldId id="350" r:id="rId30"/>
+    <p:sldId id="351" r:id="rId31"/>
+    <p:sldId id="352" r:id="rId32"/>
+    <p:sldId id="353" r:id="rId33"/>
+    <p:sldId id="360" r:id="rId34"/>
+    <p:sldId id="361" r:id="rId35"/>
+    <p:sldId id="303" r:id="rId36"/>
+    <p:sldId id="328" r:id="rId37"/>
+    <p:sldId id="329" r:id="rId38"/>
+    <p:sldId id="330" r:id="rId39"/>
+    <p:sldId id="331" r:id="rId40"/>
+    <p:sldId id="369" r:id="rId41"/>
+    <p:sldId id="370" r:id="rId42"/>
+    <p:sldId id="332" r:id="rId43"/>
+    <p:sldId id="333" r:id="rId44"/>
+    <p:sldId id="334" r:id="rId45"/>
+    <p:sldId id="335" r:id="rId46"/>
+    <p:sldId id="304" r:id="rId47"/>
+    <p:sldId id="368" r:id="rId48"/>
+    <p:sldId id="305" r:id="rId49"/>
+    <p:sldId id="306" r:id="rId50"/>
+    <p:sldId id="307" r:id="rId51"/>
+    <p:sldId id="308" r:id="rId52"/>
+    <p:sldId id="309" r:id="rId53"/>
+    <p:sldId id="261" r:id="rId54"/>
+    <p:sldId id="262" r:id="rId55"/>
+    <p:sldId id="263" r:id="rId56"/>
+    <p:sldId id="265" r:id="rId57"/>
+    <p:sldId id="363" r:id="rId58"/>
+    <p:sldId id="364" r:id="rId59"/>
+    <p:sldId id="259" r:id="rId60"/>
+    <p:sldId id="264" r:id="rId61"/>
+    <p:sldId id="365" r:id="rId62"/>
+    <p:sldId id="366" r:id="rId63"/>
+    <p:sldId id="266" r:id="rId64"/>
+    <p:sldId id="346" r:id="rId65"/>
+    <p:sldId id="362" r:id="rId66"/>
+    <p:sldId id="286" r:id="rId67"/>
+    <p:sldId id="292" r:id="rId68"/>
+    <p:sldId id="313" r:id="rId69"/>
+    <p:sldId id="293" r:id="rId70"/>
+    <p:sldId id="294" r:id="rId71"/>
+    <p:sldId id="295" r:id="rId72"/>
+    <p:sldId id="296" r:id="rId73"/>
+    <p:sldId id="297" r:id="rId74"/>
+    <p:sldId id="298" r:id="rId75"/>
+    <p:sldId id="314" r:id="rId76"/>
+    <p:sldId id="315" r:id="rId77"/>
+    <p:sldId id="316" r:id="rId78"/>
+    <p:sldId id="317" r:id="rId79"/>
+    <p:sldId id="299" r:id="rId80"/>
+    <p:sldId id="300" r:id="rId81"/>
+    <p:sldId id="301" r:id="rId82"/>
+    <p:sldId id="302" r:id="rId83"/>
+    <p:sldId id="336" r:id="rId84"/>
+    <p:sldId id="337" r:id="rId85"/>
+    <p:sldId id="342" r:id="rId86"/>
+    <p:sldId id="343" r:id="rId87"/>
+    <p:sldId id="339" r:id="rId88"/>
+    <p:sldId id="340" r:id="rId89"/>
+    <p:sldId id="284" r:id="rId90"/>
   </p:sldIdLst>
   <p:sldSz cx="9144000" cy="6858000" type="screen4x3"/>
   <p:notesSz cx="6858000" cy="9144000"/>
@@ -217,8 +218,8 @@
 <pc:chgInfo xmlns:a="http://schemas.openxmlformats.org/drawingml/2006/main" xmlns:r="http://schemas.openxmlformats.org/officeDocument/2006/relationships" xmlns:ac="http://schemas.microsoft.com/office/drawing/2013/main/command" xmlns:pc="http://schemas.microsoft.com/office/powerpoint/2013/main/command">
   <pc:docChgLst>
     <pc:chgData name="Todd Lines" userId="afaf7c3a-e8aa-4568-882a-02ad8f9e19b0" providerId="ADAL" clId="{5FF5AC1B-ABA9-43D7-A1E3-2D92732CD6E2}"/>
-    <pc:docChg chg="modSld">
-      <pc:chgData name="Todd Lines" userId="afaf7c3a-e8aa-4568-882a-02ad8f9e19b0" providerId="ADAL" clId="{5FF5AC1B-ABA9-43D7-A1E3-2D92732CD6E2}" dt="2026-08-26T18:43:07.553" v="3" actId="20577"/>
+    <pc:docChg chg="addSld modSld">
+      <pc:chgData name="Todd Lines" userId="afaf7c3a-e8aa-4568-882a-02ad8f9e19b0" providerId="ADAL" clId="{5FF5AC1B-ABA9-43D7-A1E3-2D92732CD6E2}" dt="2026-09-21T22:45:06.959" v="9" actId="1076"/>
       <pc:docMkLst>
         <pc:docMk/>
       </pc:docMkLst>
@@ -236,6 +237,21 @@
             <ac:spMk id="2" creationId="{E1C3A048-6484-8EDE-428B-D7D2F7E8C037}"/>
           </ac:spMkLst>
         </pc:spChg>
+      </pc:sldChg>
+      <pc:sldChg chg="addSp modSp new mod">
+        <pc:chgData name="Todd Lines" userId="afaf7c3a-e8aa-4568-882a-02ad8f9e19b0" providerId="ADAL" clId="{5FF5AC1B-ABA9-43D7-A1E3-2D92732CD6E2}" dt="2026-09-21T22:45:06.959" v="9" actId="1076"/>
+        <pc:sldMkLst>
+          <pc:docMk/>
+          <pc:sldMk cId="3690086549" sldId="371"/>
+        </pc:sldMkLst>
+        <pc:picChg chg="add mod">
+          <ac:chgData name="Todd Lines" userId="afaf7c3a-e8aa-4568-882a-02ad8f9e19b0" providerId="ADAL" clId="{5FF5AC1B-ABA9-43D7-A1E3-2D92732CD6E2}" dt="2026-09-21T22:45:06.959" v="9" actId="1076"/>
+          <ac:picMkLst>
+            <pc:docMk/>
+            <pc:sldMk cId="3690086549" sldId="371"/>
+            <ac:picMk id="4" creationId="{8705922C-80EF-38BF-C11D-D39AD60CCCC2}"/>
+          </ac:picMkLst>
+        </pc:picChg>
       </pc:sldChg>
     </pc:docChg>
   </pc:docChgLst>
@@ -324,7 +340,7 @@
           <a:p>
             <a:fld id="{DA081139-F0BA-49F9-93A6-6F626C1CF540}" type="datetimeFigureOut">
               <a:rPr lang="en-US" smtClean="0"/>
-              <a:t>8/26/2026</a:t>
+              <a:t>9/21/2026</a:t>
             </a:fld>
             <a:endParaRPr lang="en-US"/>
           </a:p>
@@ -701,7 +717,7 @@
                   <a:spcPct val="0"/>
                 </a:spcAft>
               </a:pPr>
-              <a:t>44</a:t>
+              <a:t>45</a:t>
             </a:fld>
             <a:endParaRPr lang="en-US"/>
           </a:p>
@@ -899,7 +915,7 @@
           <a:p>
             <a:fld id="{EDF140B7-8B0E-44A6-9E20-D5135BF064F6}" type="datetimeFigureOut">
               <a:rPr lang="en-US" smtClean="0"/>
-              <a:t>8/26/2026</a:t>
+              <a:t>9/21/2026</a:t>
             </a:fld>
             <a:endParaRPr lang="en-US"/>
           </a:p>
@@ -1062,7 +1078,7 @@
           <a:p>
             <a:fld id="{EDF140B7-8B0E-44A6-9E20-D5135BF064F6}" type="datetimeFigureOut">
               <a:rPr lang="en-US" smtClean="0"/>
-              <a:t>8/26/2026</a:t>
+              <a:t>9/21/2026</a:t>
             </a:fld>
             <a:endParaRPr lang="en-US"/>
           </a:p>
@@ -1235,7 +1251,7 @@
           <a:p>
             <a:fld id="{EDF140B7-8B0E-44A6-9E20-D5135BF064F6}" type="datetimeFigureOut">
               <a:rPr lang="en-US" smtClean="0"/>
-              <a:t>8/26/2026</a:t>
+              <a:t>9/21/2026</a:t>
             </a:fld>
             <a:endParaRPr lang="en-US"/>
           </a:p>
@@ -1398,7 +1414,7 @@
           <a:p>
             <a:fld id="{EDF140B7-8B0E-44A6-9E20-D5135BF064F6}" type="datetimeFigureOut">
               <a:rPr lang="en-US" smtClean="0"/>
-              <a:t>8/26/2026</a:t>
+              <a:t>9/21/2026</a:t>
             </a:fld>
             <a:endParaRPr lang="en-US"/>
           </a:p>
@@ -1638,7 +1654,7 @@
           <a:p>
             <a:fld id="{EDF140B7-8B0E-44A6-9E20-D5135BF064F6}" type="datetimeFigureOut">
               <a:rPr lang="en-US" smtClean="0"/>
-              <a:t>8/26/2026</a:t>
+              <a:t>9/21/2026</a:t>
             </a:fld>
             <a:endParaRPr lang="en-US"/>
           </a:p>
@@ -1918,7 +1934,7 @@
           <a:p>
             <a:fld id="{EDF140B7-8B0E-44A6-9E20-D5135BF064F6}" type="datetimeFigureOut">
               <a:rPr lang="en-US" smtClean="0"/>
-              <a:t>8/26/2026</a:t>
+              <a:t>9/21/2026</a:t>
             </a:fld>
             <a:endParaRPr lang="en-US"/>
           </a:p>
@@ -2332,7 +2348,7 @@
           <a:p>
             <a:fld id="{EDF140B7-8B0E-44A6-9E20-D5135BF064F6}" type="datetimeFigureOut">
               <a:rPr lang="en-US" smtClean="0"/>
-              <a:t>8/26/2026</a:t>
+              <a:t>9/21/2026</a:t>
             </a:fld>
             <a:endParaRPr lang="en-US"/>
           </a:p>
@@ -2444,7 +2460,7 @@
           <a:p>
             <a:fld id="{EDF140B7-8B0E-44A6-9E20-D5135BF064F6}" type="datetimeFigureOut">
               <a:rPr lang="en-US" smtClean="0"/>
-              <a:t>8/26/2026</a:t>
+              <a:t>9/21/2026</a:t>
             </a:fld>
             <a:endParaRPr lang="en-US"/>
           </a:p>
@@ -2534,7 +2550,7 @@
           <a:p>
             <a:fld id="{EDF140B7-8B0E-44A6-9E20-D5135BF064F6}" type="datetimeFigureOut">
               <a:rPr lang="en-US" smtClean="0"/>
-              <a:t>8/26/2026</a:t>
+              <a:t>9/21/2026</a:t>
             </a:fld>
             <a:endParaRPr lang="en-US"/>
           </a:p>
@@ -2804,7 +2820,7 @@
           <a:p>
             <a:fld id="{EDF140B7-8B0E-44A6-9E20-D5135BF064F6}" type="datetimeFigureOut">
               <a:rPr lang="en-US" smtClean="0"/>
-              <a:t>8/26/2026</a:t>
+              <a:t>9/21/2026</a:t>
             </a:fld>
             <a:endParaRPr lang="en-US"/>
           </a:p>
@@ -3051,7 +3067,7 @@
           <a:p>
             <a:fld id="{EDF140B7-8B0E-44A6-9E20-D5135BF064F6}" type="datetimeFigureOut">
               <a:rPr lang="en-US" smtClean="0"/>
-              <a:t>8/26/2026</a:t>
+              <a:t>9/21/2026</a:t>
             </a:fld>
             <a:endParaRPr lang="en-US"/>
           </a:p>
@@ -3257,7 +3273,7 @@
           <a:p>
             <a:fld id="{EDF140B7-8B0E-44A6-9E20-D5135BF064F6}" type="datetimeFigureOut">
               <a:rPr lang="en-US" smtClean="0"/>
-              <a:t>8/26/2026</a:t>
+              <a:t>9/21/2026</a:t>
             </a:fld>
             <a:endParaRPr lang="en-US"/>
           </a:p>
@@ -6190,6 +6206,116 @@
       </p:grpSpPr>
       <p:sp>
         <p:nvSpPr>
+          <p:cNvPr id="2" name="Title 1">
+            <a:extLst>
+              <a:ext uri="{FF2B5EF4-FFF2-40B4-BE49-F238E27FC236}">
+                <a16:creationId xmlns:a16="http://schemas.microsoft.com/office/drawing/2014/main" id="{93F431A4-527D-F3C0-1236-207303B10FBF}"/>
+              </a:ext>
+            </a:extLst>
+          </p:cNvPr>
+          <p:cNvSpPr>
+            <a:spLocks noGrp="1"/>
+          </p:cNvSpPr>
+          <p:nvPr>
+            <p:ph type="title"/>
+          </p:nvPr>
+        </p:nvSpPr>
+        <p:spPr/>
+        <p:txBody>
+          <a:bodyPr/>
+          <a:lstStyle/>
+          <a:p>
+            <a:endParaRPr lang="en-US"/>
+          </a:p>
+        </p:txBody>
+      </p:sp>
+      <p:sp>
+        <p:nvSpPr>
+          <p:cNvPr id="3" name="Content Placeholder 2">
+            <a:extLst>
+              <a:ext uri="{FF2B5EF4-FFF2-40B4-BE49-F238E27FC236}">
+                <a16:creationId xmlns:a16="http://schemas.microsoft.com/office/drawing/2014/main" id="{3874BE52-2A60-F9D7-FB11-89D0E36240E1}"/>
+              </a:ext>
+            </a:extLst>
+          </p:cNvPr>
+          <p:cNvSpPr>
+            <a:spLocks noGrp="1"/>
+          </p:cNvSpPr>
+          <p:nvPr>
+            <p:ph idx="1"/>
+          </p:nvPr>
+        </p:nvSpPr>
+        <p:spPr/>
+        <p:txBody>
+          <a:bodyPr/>
+          <a:lstStyle/>
+          <a:p>
+            <a:endParaRPr lang="en-US"/>
+          </a:p>
+        </p:txBody>
+      </p:sp>
+      <p:pic>
+        <p:nvPicPr>
+          <p:cNvPr id="4" name="Picture 3" descr="File:USFL Championship parabolic microphone 2022.png">
+            <a:extLst>
+              <a:ext uri="{FF2B5EF4-FFF2-40B4-BE49-F238E27FC236}">
+                <a16:creationId xmlns:a16="http://schemas.microsoft.com/office/drawing/2014/main" id="{8705922C-80EF-38BF-C11D-D39AD60CCCC2}"/>
+              </a:ext>
+            </a:extLst>
+          </p:cNvPr>
+          <p:cNvPicPr>
+            <a:picLocks noChangeAspect="1"/>
+          </p:cNvPicPr>
+          <p:nvPr/>
+        </p:nvPicPr>
+        <p:blipFill>
+          <a:blip r:embed="rId2"/>
+          <a:stretch>
+            <a:fillRect/>
+          </a:stretch>
+        </p:blipFill>
+        <p:spPr>
+          <a:xfrm>
+            <a:off x="1565447" y="889882"/>
+            <a:ext cx="6013106" cy="4497802"/>
+          </a:xfrm>
+          <a:prstGeom prst="rect">
+            <a:avLst/>
+          </a:prstGeom>
+        </p:spPr>
+      </p:pic>
+    </p:spTree>
+    <p:extLst>
+      <p:ext uri="{BB962C8B-B14F-4D97-AF65-F5344CB8AC3E}">
+        <p14:creationId xmlns:p14="http://schemas.microsoft.com/office/powerpoint/2010/main" val="3690086549"/>
+      </p:ext>
+    </p:extLst>
+  </p:cSld>
+  <p:clrMapOvr>
+    <a:masterClrMapping/>
+  </p:clrMapOvr>
+</p:sld>
+</file>
+
+<file path=ppt/slides/slide15.xml><?xml version="1.0" encoding="utf-8"?>
+<p:sld xmlns:a="http://schemas.openxmlformats.org/drawingml/2006/main" xmlns:r="http://schemas.openxmlformats.org/officeDocument/2006/relationships" xmlns:p="http://schemas.openxmlformats.org/presentationml/2006/main">
+  <p:cSld>
+    <p:spTree>
+      <p:nvGrpSpPr>
+        <p:cNvPr id="1" name=""/>
+        <p:cNvGrpSpPr/>
+        <p:nvPr/>
+      </p:nvGrpSpPr>
+      <p:grpSpPr>
+        <a:xfrm>
+          <a:off x="0" y="0"/>
+          <a:ext cx="0" cy="0"/>
+          <a:chOff x="0" y="0"/>
+          <a:chExt cx="0" cy="0"/>
+        </a:xfrm>
+      </p:grpSpPr>
+      <p:sp>
+        <p:nvSpPr>
           <p:cNvPr id="539649" name="Title 1"/>
           <p:cNvSpPr>
             <a:spLocks noGrp="1"/>
@@ -6296,7 +6422,7 @@
 </p:sld>
 </file>
 
-<file path=ppt/slides/slide15.xml><?xml version="1.0" encoding="utf-8"?>
+<file path=ppt/slides/slide16.xml><?xml version="1.0" encoding="utf-8"?>
 <p:sld xmlns:a="http://schemas.openxmlformats.org/drawingml/2006/main" xmlns:r="http://schemas.openxmlformats.org/officeDocument/2006/relationships" xmlns:p="http://schemas.openxmlformats.org/presentationml/2006/main">
   <p:cSld>
     <p:spTree>
@@ -6381,7 +6507,7 @@
             <a:fld id="{020877BE-92C3-491C-93AD-A4AD9F2A15F2}" type="slidenum">
               <a:rPr lang="en-US" smtClean="0"/>
               <a:pPr/>
-              <a:t>15</a:t>
+              <a:t>16</a:t>
             </a:fld>
             <a:endParaRPr lang="en-US"/>
           </a:p>
@@ -6510,7 +6636,7 @@
 </p:sld>
 </file>
 
-<file path=ppt/slides/slide16.xml><?xml version="1.0" encoding="utf-8"?>
+<file path=ppt/slides/slide17.xml><?xml version="1.0" encoding="utf-8"?>
 <p:sld xmlns:a="http://schemas.openxmlformats.org/drawingml/2006/main" xmlns:r="http://schemas.openxmlformats.org/officeDocument/2006/relationships" xmlns:p="http://schemas.openxmlformats.org/presentationml/2006/main">
   <p:cSld>
     <p:spTree>
@@ -7841,7 +7967,7 @@
 </p:sld>
 </file>
 
-<file path=ppt/slides/slide17.xml><?xml version="1.0" encoding="utf-8"?>
+<file path=ppt/slides/slide18.xml><?xml version="1.0" encoding="utf-8"?>
 <p:sld xmlns:a="http://schemas.openxmlformats.org/drawingml/2006/main" xmlns:r="http://schemas.openxmlformats.org/officeDocument/2006/relationships" xmlns:p="http://schemas.openxmlformats.org/presentationml/2006/main">
   <p:cSld>
     <p:spTree>
@@ -7917,7 +8043,7 @@
 </p:sld>
 </file>
 
-<file path=ppt/slides/slide18.xml><?xml version="1.0" encoding="utf-8"?>
+<file path=ppt/slides/slide19.xml><?xml version="1.0" encoding="utf-8"?>
 <p:sld xmlns:a="http://schemas.openxmlformats.org/drawingml/2006/main" xmlns:r="http://schemas.openxmlformats.org/officeDocument/2006/relationships" xmlns:p="http://schemas.openxmlformats.org/presentationml/2006/main">
   <p:cSld>
     <p:spTree>
@@ -8002,7 +8128,7 @@
             <a:fld id="{186E64E3-294D-42DF-BB91-93B1EBA0D53D}" type="slidenum">
               <a:rPr lang="en-US" smtClean="0"/>
               <a:pPr/>
-              <a:t>18</a:t>
+              <a:t>19</a:t>
             </a:fld>
             <a:endParaRPr lang="en-US"/>
           </a:p>
@@ -10017,7 +10143,141 @@
 </p:sld>
 </file>
 
-<file path=ppt/slides/slide19.xml><?xml version="1.0" encoding="utf-8"?>
+<file path=ppt/slides/slide2.xml><?xml version="1.0" encoding="utf-8"?>
+<p:sld xmlns:a="http://schemas.openxmlformats.org/drawingml/2006/main" xmlns:r="http://schemas.openxmlformats.org/officeDocument/2006/relationships" xmlns:p="http://schemas.openxmlformats.org/presentationml/2006/main">
+  <p:cSld>
+    <p:spTree>
+      <p:nvGrpSpPr>
+        <p:cNvPr id="1" name=""/>
+        <p:cNvGrpSpPr/>
+        <p:nvPr/>
+      </p:nvGrpSpPr>
+      <p:grpSpPr>
+        <a:xfrm>
+          <a:off x="0" y="0"/>
+          <a:ext cx="0" cy="0"/>
+          <a:chOff x="0" y="0"/>
+          <a:chExt cx="0" cy="0"/>
+        </a:xfrm>
+      </p:grpSpPr>
+      <p:sp>
+        <p:nvSpPr>
+          <p:cNvPr id="2" name="Title 1">
+            <a:extLst>
+              <a:ext uri="{FF2B5EF4-FFF2-40B4-BE49-F238E27FC236}">
+                <a16:creationId xmlns:a16="http://schemas.microsoft.com/office/drawing/2014/main" id="{F7747494-7078-AAFC-9338-9250A519BA53}"/>
+              </a:ext>
+            </a:extLst>
+          </p:cNvPr>
+          <p:cNvSpPr>
+            <a:spLocks noGrp="1"/>
+          </p:cNvSpPr>
+          <p:nvPr>
+            <p:ph type="title"/>
+          </p:nvPr>
+        </p:nvSpPr>
+        <p:spPr/>
+        <p:txBody>
+          <a:bodyPr/>
+          <a:lstStyle/>
+          <a:p>
+            <a:r>
+              <a:rPr lang="en-US" dirty="0"/>
+              <a:t>Question</a:t>
+            </a:r>
+          </a:p>
+        </p:txBody>
+      </p:sp>
+      <p:sp>
+        <p:nvSpPr>
+          <p:cNvPr id="3" name="Content Placeholder 2">
+            <a:extLst>
+              <a:ext uri="{FF2B5EF4-FFF2-40B4-BE49-F238E27FC236}">
+                <a16:creationId xmlns:a16="http://schemas.microsoft.com/office/drawing/2014/main" id="{68BAD010-38A8-C441-2B4B-5EEF4EC2FC37}"/>
+              </a:ext>
+            </a:extLst>
+          </p:cNvPr>
+          <p:cNvSpPr>
+            <a:spLocks noGrp="1"/>
+          </p:cNvSpPr>
+          <p:nvPr>
+            <p:ph idx="1"/>
+          </p:nvPr>
+        </p:nvSpPr>
+        <p:spPr/>
+        <p:txBody>
+          <a:bodyPr/>
+          <a:lstStyle/>
+          <a:p>
+            <a:pPr marL="0" indent="0">
+              <a:buNone/>
+            </a:pPr>
+            <a:r>
+              <a:rPr lang="en-US" dirty="0"/>
+              <a:t>The power delivered by a wave is proportional to </a:t>
+            </a:r>
+          </a:p>
+          <a:p>
+            <a:pPr marL="514350" indent="-514350">
+              <a:buFont typeface="+mj-lt"/>
+              <a:buAutoNum type="alphaLcParenR"/>
+            </a:pPr>
+            <a:r>
+              <a:rPr lang="en-US" dirty="0"/>
+              <a:t>The position of the end of the wave</a:t>
+            </a:r>
+          </a:p>
+          <a:p>
+            <a:pPr marL="514350" indent="-514350">
+              <a:buFont typeface="+mj-lt"/>
+              <a:buAutoNum type="alphaLcParenR"/>
+            </a:pPr>
+            <a:r>
+              <a:rPr lang="en-US" dirty="0"/>
+              <a:t>The mass of the medium</a:t>
+            </a:r>
+          </a:p>
+          <a:p>
+            <a:pPr marL="514350" indent="-514350">
+              <a:buFont typeface="+mj-lt"/>
+              <a:buAutoNum type="alphaLcParenR"/>
+            </a:pPr>
+            <a:r>
+              <a:rPr lang="en-US" dirty="0"/>
+              <a:t>The amplitude of the </a:t>
+            </a:r>
+            <a:r>
+              <a:rPr lang="en-US"/>
+              <a:t>wave squared</a:t>
+            </a:r>
+            <a:endParaRPr lang="en-US" dirty="0"/>
+          </a:p>
+          <a:p>
+            <a:pPr marL="514350" indent="-514350">
+              <a:buFont typeface="+mj-lt"/>
+              <a:buAutoNum type="alphaLcParenR"/>
+            </a:pPr>
+            <a:r>
+              <a:rPr lang="en-US" dirty="0"/>
+              <a:t>The period of the wave squared</a:t>
+            </a:r>
+          </a:p>
+        </p:txBody>
+      </p:sp>
+    </p:spTree>
+    <p:extLst>
+      <p:ext uri="{BB962C8B-B14F-4D97-AF65-F5344CB8AC3E}">
+        <p14:creationId xmlns:p14="http://schemas.microsoft.com/office/powerpoint/2010/main" val="3367812321"/>
+      </p:ext>
+    </p:extLst>
+  </p:cSld>
+  <p:clrMapOvr>
+    <a:masterClrMapping/>
+  </p:clrMapOvr>
+</p:sld>
+</file>
+
+<file path=ppt/slides/slide20.xml><?xml version="1.0" encoding="utf-8"?>
 <p:sld xmlns:a="http://schemas.openxmlformats.org/drawingml/2006/main" xmlns:r="http://schemas.openxmlformats.org/officeDocument/2006/relationships" xmlns:p="http://schemas.openxmlformats.org/presentationml/2006/main">
   <p:cSld>
     <p:spTree>
@@ -10102,7 +10362,7 @@
             <a:fld id="{D031D312-1489-4696-8AD3-D2B5D5D832E9}" type="slidenum">
               <a:rPr lang="en-US" smtClean="0"/>
               <a:pPr/>
-              <a:t>19</a:t>
+              <a:t>20</a:t>
             </a:fld>
             <a:endParaRPr lang="en-US"/>
           </a:p>
@@ -11001,141 +11261,7 @@
 </p:sld>
 </file>
 
-<file path=ppt/slides/slide2.xml><?xml version="1.0" encoding="utf-8"?>
-<p:sld xmlns:a="http://schemas.openxmlformats.org/drawingml/2006/main" xmlns:r="http://schemas.openxmlformats.org/officeDocument/2006/relationships" xmlns:p="http://schemas.openxmlformats.org/presentationml/2006/main">
-  <p:cSld>
-    <p:spTree>
-      <p:nvGrpSpPr>
-        <p:cNvPr id="1" name=""/>
-        <p:cNvGrpSpPr/>
-        <p:nvPr/>
-      </p:nvGrpSpPr>
-      <p:grpSpPr>
-        <a:xfrm>
-          <a:off x="0" y="0"/>
-          <a:ext cx="0" cy="0"/>
-          <a:chOff x="0" y="0"/>
-          <a:chExt cx="0" cy="0"/>
-        </a:xfrm>
-      </p:grpSpPr>
-      <p:sp>
-        <p:nvSpPr>
-          <p:cNvPr id="2" name="Title 1">
-            <a:extLst>
-              <a:ext uri="{FF2B5EF4-FFF2-40B4-BE49-F238E27FC236}">
-                <a16:creationId xmlns:a16="http://schemas.microsoft.com/office/drawing/2014/main" id="{F7747494-7078-AAFC-9338-9250A519BA53}"/>
-              </a:ext>
-            </a:extLst>
-          </p:cNvPr>
-          <p:cNvSpPr>
-            <a:spLocks noGrp="1"/>
-          </p:cNvSpPr>
-          <p:nvPr>
-            <p:ph type="title"/>
-          </p:nvPr>
-        </p:nvSpPr>
-        <p:spPr/>
-        <p:txBody>
-          <a:bodyPr/>
-          <a:lstStyle/>
-          <a:p>
-            <a:r>
-              <a:rPr lang="en-US" dirty="0"/>
-              <a:t>Question</a:t>
-            </a:r>
-          </a:p>
-        </p:txBody>
-      </p:sp>
-      <p:sp>
-        <p:nvSpPr>
-          <p:cNvPr id="3" name="Content Placeholder 2">
-            <a:extLst>
-              <a:ext uri="{FF2B5EF4-FFF2-40B4-BE49-F238E27FC236}">
-                <a16:creationId xmlns:a16="http://schemas.microsoft.com/office/drawing/2014/main" id="{68BAD010-38A8-C441-2B4B-5EEF4EC2FC37}"/>
-              </a:ext>
-            </a:extLst>
-          </p:cNvPr>
-          <p:cNvSpPr>
-            <a:spLocks noGrp="1"/>
-          </p:cNvSpPr>
-          <p:nvPr>
-            <p:ph idx="1"/>
-          </p:nvPr>
-        </p:nvSpPr>
-        <p:spPr/>
-        <p:txBody>
-          <a:bodyPr/>
-          <a:lstStyle/>
-          <a:p>
-            <a:pPr marL="0" indent="0">
-              <a:buNone/>
-            </a:pPr>
-            <a:r>
-              <a:rPr lang="en-US" dirty="0"/>
-              <a:t>The power delivered by a wave is proportional to </a:t>
-            </a:r>
-          </a:p>
-          <a:p>
-            <a:pPr marL="514350" indent="-514350">
-              <a:buFont typeface="+mj-lt"/>
-              <a:buAutoNum type="alphaLcParenR"/>
-            </a:pPr>
-            <a:r>
-              <a:rPr lang="en-US" dirty="0"/>
-              <a:t>The position of the end of the wave</a:t>
-            </a:r>
-          </a:p>
-          <a:p>
-            <a:pPr marL="514350" indent="-514350">
-              <a:buFont typeface="+mj-lt"/>
-              <a:buAutoNum type="alphaLcParenR"/>
-            </a:pPr>
-            <a:r>
-              <a:rPr lang="en-US" dirty="0"/>
-              <a:t>The mass of the medium</a:t>
-            </a:r>
-          </a:p>
-          <a:p>
-            <a:pPr marL="514350" indent="-514350">
-              <a:buFont typeface="+mj-lt"/>
-              <a:buAutoNum type="alphaLcParenR"/>
-            </a:pPr>
-            <a:r>
-              <a:rPr lang="en-US" dirty="0"/>
-              <a:t>The amplitude of the </a:t>
-            </a:r>
-            <a:r>
-              <a:rPr lang="en-US"/>
-              <a:t>wave squared</a:t>
-            </a:r>
-            <a:endParaRPr lang="en-US" dirty="0"/>
-          </a:p>
-          <a:p>
-            <a:pPr marL="514350" indent="-514350">
-              <a:buFont typeface="+mj-lt"/>
-              <a:buAutoNum type="alphaLcParenR"/>
-            </a:pPr>
-            <a:r>
-              <a:rPr lang="en-US" dirty="0"/>
-              <a:t>The period of the wave squared</a:t>
-            </a:r>
-          </a:p>
-        </p:txBody>
-      </p:sp>
-    </p:spTree>
-    <p:extLst>
-      <p:ext uri="{BB962C8B-B14F-4D97-AF65-F5344CB8AC3E}">
-        <p14:creationId xmlns:p14="http://schemas.microsoft.com/office/powerpoint/2010/main" val="3367812321"/>
-      </p:ext>
-    </p:extLst>
-  </p:cSld>
-  <p:clrMapOvr>
-    <a:masterClrMapping/>
-  </p:clrMapOvr>
-</p:sld>
-</file>
-
-<file path=ppt/slides/slide20.xml><?xml version="1.0" encoding="utf-8"?>
+<file path=ppt/slides/slide21.xml><?xml version="1.0" encoding="utf-8"?>
 <p:sld xmlns:a="http://schemas.openxmlformats.org/drawingml/2006/main" xmlns:r="http://schemas.openxmlformats.org/officeDocument/2006/relationships" xmlns:p="http://schemas.openxmlformats.org/presentationml/2006/main">
   <p:cSld>
     <p:spTree>
@@ -11220,7 +11346,7 @@
             <a:fld id="{308F9FDA-4605-470B-B956-789B87D2F90C}" type="slidenum">
               <a:rPr lang="en-US" smtClean="0"/>
               <a:pPr/>
-              <a:t>20</a:t>
+              <a:t>21</a:t>
             </a:fld>
             <a:endParaRPr lang="en-US"/>
           </a:p>
@@ -11285,7 +11411,7 @@
 </p:sld>
 </file>
 
-<file path=ppt/slides/slide21.xml><?xml version="1.0" encoding="utf-8"?>
+<file path=ppt/slides/slide22.xml><?xml version="1.0" encoding="utf-8"?>
 <p:sld xmlns:a="http://schemas.openxmlformats.org/drawingml/2006/main" xmlns:r="http://schemas.openxmlformats.org/officeDocument/2006/relationships" xmlns:p="http://schemas.openxmlformats.org/presentationml/2006/main">
   <p:cSld>
     <p:spTree>
@@ -12578,7 +12704,7 @@
 </p:sld>
 </file>
 
-<file path=ppt/slides/slide22.xml><?xml version="1.0" encoding="utf-8"?>
+<file path=ppt/slides/slide23.xml><?xml version="1.0" encoding="utf-8"?>
 <p:sld xmlns:a="http://schemas.openxmlformats.org/drawingml/2006/main" xmlns:r="http://schemas.openxmlformats.org/officeDocument/2006/relationships" xmlns:p="http://schemas.openxmlformats.org/presentationml/2006/main">
   <p:cSld>
     <p:spTree>
@@ -12654,7 +12780,7 @@
 </p:sld>
 </file>
 
-<file path=ppt/slides/slide23.xml><?xml version="1.0" encoding="utf-8"?>
+<file path=ppt/slides/slide24.xml><?xml version="1.0" encoding="utf-8"?>
 <p:sld xmlns:a="http://schemas.openxmlformats.org/drawingml/2006/main" xmlns:r="http://schemas.openxmlformats.org/officeDocument/2006/relationships" xmlns:p="http://schemas.openxmlformats.org/presentationml/2006/main">
   <p:cSld>
     <p:spTree>
@@ -12739,7 +12865,7 @@
             <a:fld id="{59D292EC-ADB3-4B5F-956B-BE6C725E96E4}" type="slidenum">
               <a:rPr lang="en-US" smtClean="0"/>
               <a:pPr/>
-              <a:t>23</a:t>
+              <a:t>24</a:t>
             </a:fld>
             <a:endParaRPr lang="en-US"/>
           </a:p>
@@ -14436,7 +14562,7 @@
 </p:sld>
 </file>
 
-<file path=ppt/slides/slide24.xml><?xml version="1.0" encoding="utf-8"?>
+<file path=ppt/slides/slide25.xml><?xml version="1.0" encoding="utf-8"?>
 <p:sld xmlns:a="http://schemas.openxmlformats.org/drawingml/2006/main" xmlns:r="http://schemas.openxmlformats.org/officeDocument/2006/relationships" xmlns:p="http://schemas.openxmlformats.org/presentationml/2006/main">
   <p:cSld>
     <p:spTree>
@@ -14521,7 +14647,7 @@
             <a:fld id="{FEC60645-FEDE-4321-8C90-8A445AB3CA12}" type="slidenum">
               <a:rPr lang="en-US" smtClean="0"/>
               <a:pPr/>
-              <a:t>24</a:t>
+              <a:t>25</a:t>
             </a:fld>
             <a:endParaRPr lang="en-US"/>
           </a:p>
@@ -14658,7 +14784,7 @@
 </p:sld>
 </file>
 
-<file path=ppt/slides/slide25.xml><?xml version="1.0" encoding="utf-8"?>
+<file path=ppt/slides/slide26.xml><?xml version="1.0" encoding="utf-8"?>
 <p:sld xmlns:a="http://schemas.openxmlformats.org/drawingml/2006/main" xmlns:r="http://schemas.openxmlformats.org/officeDocument/2006/relationships" xmlns:p="http://schemas.openxmlformats.org/presentationml/2006/main">
   <p:cSld>
     <p:spTree>
@@ -14743,7 +14869,7 @@
             <a:fld id="{8AE0FC15-F05C-481F-90B8-18635F0468E7}" type="slidenum">
               <a:rPr lang="en-US" smtClean="0"/>
               <a:pPr/>
-              <a:t>25</a:t>
+              <a:t>26</a:t>
             </a:fld>
             <a:endParaRPr lang="en-US"/>
           </a:p>
@@ -16682,7 +16808,7 @@
 </p:sld>
 </file>
 
-<file path=ppt/slides/slide26.xml><?xml version="1.0" encoding="utf-8"?>
+<file path=ppt/slides/slide27.xml><?xml version="1.0" encoding="utf-8"?>
 <p:sld xmlns:a="http://schemas.openxmlformats.org/drawingml/2006/main" xmlns:r="http://schemas.openxmlformats.org/officeDocument/2006/relationships" xmlns:p="http://schemas.openxmlformats.org/presentationml/2006/main">
   <p:cSld>
     <p:spTree>
@@ -16719,7 +16845,7 @@
             <a:fld id="{E2DA8EDD-E190-4DCB-BB40-24D9141A10B8}" type="slidenum">
               <a:rPr lang="en-US" smtClean="0"/>
               <a:pPr/>
-              <a:t>26</a:t>
+              <a:t>27</a:t>
             </a:fld>
             <a:endParaRPr lang="en-US"/>
           </a:p>
@@ -16807,7 +16933,7 @@
 </p:sld>
 </file>
 
-<file path=ppt/slides/slide27.xml><?xml version="1.0" encoding="utf-8"?>
+<file path=ppt/slides/slide28.xml><?xml version="1.0" encoding="utf-8"?>
 <p:sld xmlns:a="http://schemas.openxmlformats.org/drawingml/2006/main" xmlns:r="http://schemas.openxmlformats.org/officeDocument/2006/relationships" xmlns:p="http://schemas.openxmlformats.org/presentationml/2006/main">
   <p:cSld>
     <p:spTree>
@@ -16844,7 +16970,7 @@
             <a:fld id="{CFFCD0D3-C27D-45E7-B26E-D48722990FFA}" type="slidenum">
               <a:rPr lang="en-US" smtClean="0"/>
               <a:pPr/>
-              <a:t>27</a:t>
+              <a:t>28</a:t>
             </a:fld>
             <a:endParaRPr lang="en-US"/>
           </a:p>
@@ -16932,7 +17058,7 @@
 </p:sld>
 </file>
 
-<file path=ppt/slides/slide28.xml><?xml version="1.0" encoding="utf-8"?>
+<file path=ppt/slides/slide29.xml><?xml version="1.0" encoding="utf-8"?>
 <p:sld xmlns:a="http://schemas.openxmlformats.org/drawingml/2006/main" xmlns:r="http://schemas.openxmlformats.org/officeDocument/2006/relationships" xmlns:p="http://schemas.openxmlformats.org/presentationml/2006/main">
   <p:cSld>
     <p:spTree>
@@ -17058,7 +17184,7 @@
             <a:fld id="{6A354CA6-2371-4C3D-9BCD-3813C9281DFB}" type="slidenum">
               <a:rPr lang="en-US" smtClean="0"/>
               <a:pPr/>
-              <a:t>28</a:t>
+              <a:t>29</a:t>
             </a:fld>
             <a:endParaRPr lang="en-US"/>
           </a:p>
@@ -17068,141 +17194,6 @@
     <p:extLst>
       <p:ext uri="{BB962C8B-B14F-4D97-AF65-F5344CB8AC3E}">
         <p14:creationId xmlns:p14="http://schemas.microsoft.com/office/powerpoint/2010/main" val="1339363551"/>
-      </p:ext>
-    </p:extLst>
-  </p:cSld>
-  <p:clrMapOvr>
-    <a:masterClrMapping/>
-  </p:clrMapOvr>
-</p:sld>
-</file>
-
-<file path=ppt/slides/slide29.xml><?xml version="1.0" encoding="utf-8"?>
-<p:sld xmlns:a="http://schemas.openxmlformats.org/drawingml/2006/main" xmlns:r="http://schemas.openxmlformats.org/officeDocument/2006/relationships" xmlns:p="http://schemas.openxmlformats.org/presentationml/2006/main">
-  <p:cSld>
-    <p:spTree>
-      <p:nvGrpSpPr>
-        <p:cNvPr id="1" name=""/>
-        <p:cNvGrpSpPr/>
-        <p:nvPr/>
-      </p:nvGrpSpPr>
-      <p:grpSpPr>
-        <a:xfrm>
-          <a:off x="0" y="0"/>
-          <a:ext cx="0" cy="0"/>
-          <a:chOff x="0" y="0"/>
-          <a:chExt cx="0" cy="0"/>
-        </a:xfrm>
-      </p:grpSpPr>
-      <p:sp>
-        <p:nvSpPr>
-          <p:cNvPr id="53251" name="Rectangle 2"/>
-          <p:cNvSpPr>
-            <a:spLocks noGrp="1" noChangeArrowheads="1"/>
-          </p:cNvSpPr>
-          <p:nvPr>
-            <p:ph type="title"/>
-          </p:nvPr>
-        </p:nvSpPr>
-        <p:spPr/>
-        <p:txBody>
-          <a:bodyPr/>
-          <a:lstStyle/>
-          <a:p>
-            <a:pPr eaLnBrk="1" hangingPunct="1"/>
-            <a:r>
-              <a:rPr lang="en-US" dirty="0"/>
-              <a:t>Question 16.10</a:t>
-            </a:r>
-          </a:p>
-        </p:txBody>
-      </p:sp>
-      <p:sp>
-        <p:nvSpPr>
-          <p:cNvPr id="53252" name="Rectangle 3"/>
-          <p:cNvSpPr>
-            <a:spLocks noGrp="1" noChangeArrowheads="1"/>
-          </p:cNvSpPr>
-          <p:nvPr>
-            <p:ph idx="1"/>
-          </p:nvPr>
-        </p:nvSpPr>
-        <p:spPr/>
-        <p:txBody>
-          <a:bodyPr/>
-          <a:lstStyle/>
-          <a:p>
-            <a:pPr marL="609600" indent="-609600" eaLnBrk="1" hangingPunct="1">
-              <a:buFontTx/>
-              <a:buNone/>
-            </a:pPr>
-            <a:r>
-              <a:rPr lang="en-US"/>
-              <a:t>A wave travels across a boundary between two different weight ropes. If it goes from the lighter to the heavier rope, the reflected wave</a:t>
-            </a:r>
-          </a:p>
-          <a:p>
-            <a:pPr marL="609600" indent="-609600" eaLnBrk="1" hangingPunct="1">
-              <a:buFontTx/>
-              <a:buAutoNum type="alphaLcParenR"/>
-            </a:pPr>
-            <a:r>
-              <a:rPr lang="en-US"/>
-              <a:t>Is inverted</a:t>
-            </a:r>
-          </a:p>
-          <a:p>
-            <a:pPr marL="609600" indent="-609600" eaLnBrk="1" hangingPunct="1">
-              <a:buFontTx/>
-              <a:buAutoNum type="alphaLcParenR"/>
-            </a:pPr>
-            <a:r>
-              <a:rPr lang="en-US"/>
-              <a:t>Is not inverted</a:t>
-            </a:r>
-          </a:p>
-          <a:p>
-            <a:pPr marL="609600" indent="-609600" eaLnBrk="1" hangingPunct="1">
-              <a:buFontTx/>
-              <a:buAutoNum type="alphaLcParenR"/>
-            </a:pPr>
-            <a:r>
-              <a:rPr lang="en-US"/>
-              <a:t>Can’t tell</a:t>
-            </a:r>
-          </a:p>
-        </p:txBody>
-      </p:sp>
-      <p:sp>
-        <p:nvSpPr>
-          <p:cNvPr id="53250" name="Slide Number Placeholder 5"/>
-          <p:cNvSpPr>
-            <a:spLocks noGrp="1"/>
-          </p:cNvSpPr>
-          <p:nvPr>
-            <p:ph type="sldNum" sz="quarter" idx="12"/>
-          </p:nvPr>
-        </p:nvSpPr>
-        <p:spPr>
-          <a:noFill/>
-        </p:spPr>
-        <p:txBody>
-          <a:bodyPr/>
-          <a:lstStyle/>
-          <a:p>
-            <a:fld id="{74CD2813-E4C4-402A-A221-FA93E480D86C}" type="slidenum">
-              <a:rPr lang="en-US" smtClean="0"/>
-              <a:pPr/>
-              <a:t>29</a:t>
-            </a:fld>
-            <a:endParaRPr lang="en-US"/>
-          </a:p>
-        </p:txBody>
-      </p:sp>
-    </p:spTree>
-    <p:extLst>
-      <p:ext uri="{BB962C8B-B14F-4D97-AF65-F5344CB8AC3E}">
-        <p14:creationId xmlns:p14="http://schemas.microsoft.com/office/powerpoint/2010/main" val="1349580765"/>
       </p:ext>
     </p:extLst>
   </p:cSld>
@@ -17985,6 +17976,141 @@
       </p:grpSpPr>
       <p:sp>
         <p:nvSpPr>
+          <p:cNvPr id="53251" name="Rectangle 2"/>
+          <p:cNvSpPr>
+            <a:spLocks noGrp="1" noChangeArrowheads="1"/>
+          </p:cNvSpPr>
+          <p:nvPr>
+            <p:ph type="title"/>
+          </p:nvPr>
+        </p:nvSpPr>
+        <p:spPr/>
+        <p:txBody>
+          <a:bodyPr/>
+          <a:lstStyle/>
+          <a:p>
+            <a:pPr eaLnBrk="1" hangingPunct="1"/>
+            <a:r>
+              <a:rPr lang="en-US" dirty="0"/>
+              <a:t>Question 16.10</a:t>
+            </a:r>
+          </a:p>
+        </p:txBody>
+      </p:sp>
+      <p:sp>
+        <p:nvSpPr>
+          <p:cNvPr id="53252" name="Rectangle 3"/>
+          <p:cNvSpPr>
+            <a:spLocks noGrp="1" noChangeArrowheads="1"/>
+          </p:cNvSpPr>
+          <p:nvPr>
+            <p:ph idx="1"/>
+          </p:nvPr>
+        </p:nvSpPr>
+        <p:spPr/>
+        <p:txBody>
+          <a:bodyPr/>
+          <a:lstStyle/>
+          <a:p>
+            <a:pPr marL="609600" indent="-609600" eaLnBrk="1" hangingPunct="1">
+              <a:buFontTx/>
+              <a:buNone/>
+            </a:pPr>
+            <a:r>
+              <a:rPr lang="en-US"/>
+              <a:t>A wave travels across a boundary between two different weight ropes. If it goes from the lighter to the heavier rope, the reflected wave</a:t>
+            </a:r>
+          </a:p>
+          <a:p>
+            <a:pPr marL="609600" indent="-609600" eaLnBrk="1" hangingPunct="1">
+              <a:buFontTx/>
+              <a:buAutoNum type="alphaLcParenR"/>
+            </a:pPr>
+            <a:r>
+              <a:rPr lang="en-US"/>
+              <a:t>Is inverted</a:t>
+            </a:r>
+          </a:p>
+          <a:p>
+            <a:pPr marL="609600" indent="-609600" eaLnBrk="1" hangingPunct="1">
+              <a:buFontTx/>
+              <a:buAutoNum type="alphaLcParenR"/>
+            </a:pPr>
+            <a:r>
+              <a:rPr lang="en-US"/>
+              <a:t>Is not inverted</a:t>
+            </a:r>
+          </a:p>
+          <a:p>
+            <a:pPr marL="609600" indent="-609600" eaLnBrk="1" hangingPunct="1">
+              <a:buFontTx/>
+              <a:buAutoNum type="alphaLcParenR"/>
+            </a:pPr>
+            <a:r>
+              <a:rPr lang="en-US"/>
+              <a:t>Can’t tell</a:t>
+            </a:r>
+          </a:p>
+        </p:txBody>
+      </p:sp>
+      <p:sp>
+        <p:nvSpPr>
+          <p:cNvPr id="53250" name="Slide Number Placeholder 5"/>
+          <p:cNvSpPr>
+            <a:spLocks noGrp="1"/>
+          </p:cNvSpPr>
+          <p:nvPr>
+            <p:ph type="sldNum" sz="quarter" idx="12"/>
+          </p:nvPr>
+        </p:nvSpPr>
+        <p:spPr>
+          <a:noFill/>
+        </p:spPr>
+        <p:txBody>
+          <a:bodyPr/>
+          <a:lstStyle/>
+          <a:p>
+            <a:fld id="{74CD2813-E4C4-402A-A221-FA93E480D86C}" type="slidenum">
+              <a:rPr lang="en-US" smtClean="0"/>
+              <a:pPr/>
+              <a:t>30</a:t>
+            </a:fld>
+            <a:endParaRPr lang="en-US"/>
+          </a:p>
+        </p:txBody>
+      </p:sp>
+    </p:spTree>
+    <p:extLst>
+      <p:ext uri="{BB962C8B-B14F-4D97-AF65-F5344CB8AC3E}">
+        <p14:creationId xmlns:p14="http://schemas.microsoft.com/office/powerpoint/2010/main" val="1349580765"/>
+      </p:ext>
+    </p:extLst>
+  </p:cSld>
+  <p:clrMapOvr>
+    <a:masterClrMapping/>
+  </p:clrMapOvr>
+</p:sld>
+</file>
+
+<file path=ppt/slides/slide31.xml><?xml version="1.0" encoding="utf-8"?>
+<p:sld xmlns:a="http://schemas.openxmlformats.org/drawingml/2006/main" xmlns:r="http://schemas.openxmlformats.org/officeDocument/2006/relationships" xmlns:p="http://schemas.openxmlformats.org/presentationml/2006/main">
+  <p:cSld>
+    <p:spTree>
+      <p:nvGrpSpPr>
+        <p:cNvPr id="1" name=""/>
+        <p:cNvGrpSpPr/>
+        <p:nvPr/>
+      </p:nvGrpSpPr>
+      <p:grpSpPr>
+        <a:xfrm>
+          <a:off x="0" y="0"/>
+          <a:ext cx="0" cy="0"/>
+          <a:chOff x="0" y="0"/>
+          <a:chExt cx="0" cy="0"/>
+        </a:xfrm>
+      </p:grpSpPr>
+      <p:sp>
+        <p:nvSpPr>
           <p:cNvPr id="54275" name="Rectangle 2"/>
           <p:cNvSpPr>
             <a:spLocks noGrp="1" noChangeArrowheads="1"/>
@@ -18107,7 +18233,7 @@
             <a:fld id="{57F00098-A586-4021-A6FD-B25936B14AFD}" type="slidenum">
               <a:rPr lang="en-US" smtClean="0"/>
               <a:pPr/>
-              <a:t>30</a:t>
+              <a:t>31</a:t>
             </a:fld>
             <a:endParaRPr lang="en-US"/>
           </a:p>
@@ -18126,7 +18252,7 @@
 </p:sld>
 </file>
 
-<file path=ppt/slides/slide31.xml><?xml version="1.0" encoding="utf-8"?>
+<file path=ppt/slides/slide32.xml><?xml version="1.0" encoding="utf-8"?>
 <p:sld xmlns:a="http://schemas.openxmlformats.org/drawingml/2006/main" xmlns:r="http://schemas.openxmlformats.org/officeDocument/2006/relationships" xmlns:p="http://schemas.openxmlformats.org/presentationml/2006/main">
   <p:cSld>
     <p:spTree>
@@ -18246,7 +18372,7 @@
             <a:fld id="{1D24A40A-39FE-434B-BF0F-F604B45A6121}" type="slidenum">
               <a:rPr lang="en-US" smtClean="0"/>
               <a:pPr/>
-              <a:t>31</a:t>
+              <a:t>32</a:t>
             </a:fld>
             <a:endParaRPr lang="en-US"/>
           </a:p>
@@ -18265,7 +18391,7 @@
 </p:sld>
 </file>
 
-<file path=ppt/slides/slide32.xml><?xml version="1.0" encoding="utf-8"?>
+<file path=ppt/slides/slide33.xml><?xml version="1.0" encoding="utf-8"?>
 <p:sld xmlns:a="http://schemas.openxmlformats.org/drawingml/2006/main" xmlns:r="http://schemas.openxmlformats.org/officeDocument/2006/relationships" xmlns:p="http://schemas.openxmlformats.org/presentationml/2006/main">
   <p:cSld>
     <p:spTree>
@@ -18350,7 +18476,7 @@
             <a:fld id="{6983E60E-D79A-4609-A31C-60EED159D95A}" type="slidenum">
               <a:rPr lang="en-US" smtClean="0"/>
               <a:pPr/>
-              <a:t>32</a:t>
+              <a:t>33</a:t>
             </a:fld>
             <a:endParaRPr lang="en-US"/>
           </a:p>
@@ -18968,7 +19094,7 @@
 </p:sld>
 </file>
 
-<file path=ppt/slides/slide33.xml><?xml version="1.0" encoding="utf-8"?>
+<file path=ppt/slides/slide34.xml><?xml version="1.0" encoding="utf-8"?>
 <p:sld xmlns:a="http://schemas.openxmlformats.org/drawingml/2006/main" xmlns:r="http://schemas.openxmlformats.org/officeDocument/2006/relationships" xmlns:p="http://schemas.openxmlformats.org/presentationml/2006/main">
   <p:cSld>
     <p:spTree>
@@ -19144,7 +19270,7 @@
 </p:sld>
 </file>
 
-<file path=ppt/slides/slide34.xml><?xml version="1.0" encoding="utf-8"?>
+<file path=ppt/slides/slide35.xml><?xml version="1.0" encoding="utf-8"?>
 <p:sld xmlns:a="http://schemas.openxmlformats.org/drawingml/2006/main" xmlns:r="http://schemas.openxmlformats.org/officeDocument/2006/relationships" xmlns:p="http://schemas.openxmlformats.org/presentationml/2006/main">
   <p:cSld>
     <p:spTree>
@@ -19690,7 +19816,7 @@
 </p:sld>
 </file>
 
-<file path=ppt/slides/slide35.xml><?xml version="1.0" encoding="utf-8"?>
+<file path=ppt/slides/slide36.xml><?xml version="1.0" encoding="utf-8"?>
 <p:sld xmlns:a="http://schemas.openxmlformats.org/drawingml/2006/main" xmlns:r="http://schemas.openxmlformats.org/officeDocument/2006/relationships" xmlns:p="http://schemas.openxmlformats.org/presentationml/2006/main">
   <p:cSld>
     <p:spTree>
@@ -19766,7 +19892,7 @@
 </p:sld>
 </file>
 
-<file path=ppt/slides/slide36.xml><?xml version="1.0" encoding="utf-8"?>
+<file path=ppt/slides/slide37.xml><?xml version="1.0" encoding="utf-8"?>
 <p:sld xmlns:a="http://schemas.openxmlformats.org/drawingml/2006/main" xmlns:r="http://schemas.openxmlformats.org/officeDocument/2006/relationships" xmlns:p="http://schemas.openxmlformats.org/presentationml/2006/main">
   <p:cSld>
     <p:spTree>
@@ -20001,7 +20127,7 @@
 </p:sld>
 </file>
 
-<file path=ppt/slides/slide37.xml><?xml version="1.0" encoding="utf-8"?>
+<file path=ppt/slides/slide38.xml><?xml version="1.0" encoding="utf-8"?>
 <p:sld xmlns:a="http://schemas.openxmlformats.org/drawingml/2006/main" xmlns:r="http://schemas.openxmlformats.org/officeDocument/2006/relationships" xmlns:p="http://schemas.openxmlformats.org/presentationml/2006/main">
   <p:cSld>
     <p:spTree>
@@ -20352,7 +20478,7 @@
 </p:sld>
 </file>
 
-<file path=ppt/slides/slide38.xml><?xml version="1.0" encoding="utf-8"?>
+<file path=ppt/slides/slide39.xml><?xml version="1.0" encoding="utf-8"?>
 <p:sld xmlns:a="http://schemas.openxmlformats.org/drawingml/2006/main" xmlns:r="http://schemas.openxmlformats.org/officeDocument/2006/relationships" xmlns:p="http://schemas.openxmlformats.org/presentationml/2006/main">
   <p:cSld>
     <p:spTree>
@@ -20896,7 +21022,169 @@
 </p:sld>
 </file>
 
-<file path=ppt/slides/slide39.xml><?xml version="1.0" encoding="utf-8"?>
+<file path=ppt/slides/slide4.xml><?xml version="1.0" encoding="utf-8"?>
+<p:sld xmlns:a="http://schemas.openxmlformats.org/drawingml/2006/main" xmlns:r="http://schemas.openxmlformats.org/officeDocument/2006/relationships" xmlns:p="http://schemas.openxmlformats.org/presentationml/2006/main">
+  <p:cSld>
+    <p:spTree>
+      <p:nvGrpSpPr>
+        <p:cNvPr id="1" name=""/>
+        <p:cNvGrpSpPr/>
+        <p:nvPr/>
+      </p:nvGrpSpPr>
+      <p:grpSpPr>
+        <a:xfrm>
+          <a:off x="0" y="0"/>
+          <a:ext cx="0" cy="0"/>
+          <a:chOff x="0" y="0"/>
+          <a:chExt cx="0" cy="0"/>
+        </a:xfrm>
+      </p:grpSpPr>
+      <p:sp>
+        <p:nvSpPr>
+          <p:cNvPr id="2" name="Title 1"/>
+          <p:cNvSpPr>
+            <a:spLocks noGrp="1"/>
+          </p:cNvSpPr>
+          <p:nvPr>
+            <p:ph type="title"/>
+          </p:nvPr>
+        </p:nvSpPr>
+        <p:spPr/>
+        <p:txBody>
+          <a:bodyPr/>
+          <a:lstStyle/>
+          <a:p>
+            <a:r>
+              <a:rPr lang="en-US" dirty="0"/>
+              <a:t>Question  223.4.5     123.22.1</a:t>
+            </a:r>
+          </a:p>
+        </p:txBody>
+      </p:sp>
+      <p:sp>
+        <p:nvSpPr>
+          <p:cNvPr id="3" name="Content Placeholder 2"/>
+          <p:cNvSpPr>
+            <a:spLocks noGrp="1"/>
+          </p:cNvSpPr>
+          <p:nvPr>
+            <p:ph idx="1"/>
+          </p:nvPr>
+        </p:nvSpPr>
+        <p:spPr/>
+        <p:txBody>
+          <a:bodyPr/>
+          <a:lstStyle/>
+          <a:p>
+            <a:pPr>
+              <a:buNone/>
+            </a:pPr>
+            <a:r>
+              <a:rPr lang="en-US" dirty="0"/>
+              <a:t>A 60W light bulb is allowed to burn for 3600s. How much energy has been used?</a:t>
+            </a:r>
+          </a:p>
+          <a:p>
+            <a:pPr marL="514350" indent="-514350">
+              <a:buFont typeface="+mj-lt"/>
+              <a:buAutoNum type="alphaLcParenR"/>
+            </a:pPr>
+            <a:r>
+              <a:rPr lang="en-US" dirty="0"/>
+              <a:t>36000J</a:t>
+            </a:r>
+          </a:p>
+          <a:p>
+            <a:pPr marL="514350" indent="-514350">
+              <a:buFont typeface="+mj-lt"/>
+              <a:buAutoNum type="alphaLcParenR"/>
+            </a:pPr>
+            <a:r>
+              <a:rPr lang="en-US" dirty="0"/>
+              <a:t>72000J</a:t>
+            </a:r>
+          </a:p>
+          <a:p>
+            <a:pPr marL="514350" indent="-514350">
+              <a:buFont typeface="+mj-lt"/>
+              <a:buAutoNum type="alphaLcParenR"/>
+            </a:pPr>
+            <a:r>
+              <a:rPr lang="en-US" dirty="0"/>
+              <a:t>144000J</a:t>
+            </a:r>
+          </a:p>
+          <a:p>
+            <a:pPr marL="514350" indent="-514350">
+              <a:buFont typeface="+mj-lt"/>
+              <a:buAutoNum type="alphaLcParenR"/>
+            </a:pPr>
+            <a:r>
+              <a:rPr lang="en-US" dirty="0"/>
+              <a:t>216000J</a:t>
+            </a:r>
+          </a:p>
+          <a:p>
+            <a:pPr marL="514350" indent="-514350">
+              <a:buFont typeface="+mj-lt"/>
+              <a:buAutoNum type="alphaLcParenR"/>
+            </a:pPr>
+            <a:r>
+              <a:rPr lang="en-US" dirty="0"/>
+              <a:t>5400000J</a:t>
+            </a:r>
+          </a:p>
+          <a:p>
+            <a:pPr>
+              <a:buNone/>
+            </a:pPr>
+            <a:endParaRPr lang="en-US" dirty="0"/>
+          </a:p>
+        </p:txBody>
+      </p:sp>
+      <p:sp>
+        <p:nvSpPr>
+          <p:cNvPr id="4" name="Slide Number Placeholder 3"/>
+          <p:cNvSpPr>
+            <a:spLocks noGrp="1"/>
+          </p:cNvSpPr>
+          <p:nvPr>
+            <p:ph type="sldNum" sz="quarter" idx="12"/>
+          </p:nvPr>
+        </p:nvSpPr>
+        <p:spPr/>
+        <p:txBody>
+          <a:bodyPr/>
+          <a:lstStyle/>
+          <a:p>
+            <a:pPr>
+              <a:defRPr/>
+            </a:pPr>
+            <a:fld id="{64137B81-8888-4253-92EC-0AED2A590749}" type="slidenum">
+              <a:rPr lang="en-US" smtClean="0"/>
+              <a:pPr>
+                <a:defRPr/>
+              </a:pPr>
+              <a:t>4</a:t>
+            </a:fld>
+            <a:endParaRPr lang="en-US"/>
+          </a:p>
+        </p:txBody>
+      </p:sp>
+    </p:spTree>
+    <p:extLst>
+      <p:ext uri="{BB962C8B-B14F-4D97-AF65-F5344CB8AC3E}">
+        <p14:creationId xmlns:p14="http://schemas.microsoft.com/office/powerpoint/2010/main" val="1716686287"/>
+      </p:ext>
+    </p:extLst>
+  </p:cSld>
+  <p:clrMapOvr>
+    <a:masterClrMapping/>
+  </p:clrMapOvr>
+</p:sld>
+</file>
+
+<file path=ppt/slides/slide40.xml><?xml version="1.0" encoding="utf-8"?>
 <p:sld xmlns:a="http://schemas.openxmlformats.org/drawingml/2006/main" xmlns:r="http://schemas.openxmlformats.org/officeDocument/2006/relationships" xmlns:p="http://schemas.openxmlformats.org/presentationml/2006/main">
   <p:cSld>
     <p:spTree>
@@ -20990,169 +21278,7 @@
 </p:sld>
 </file>
 
-<file path=ppt/slides/slide4.xml><?xml version="1.0" encoding="utf-8"?>
-<p:sld xmlns:a="http://schemas.openxmlformats.org/drawingml/2006/main" xmlns:r="http://schemas.openxmlformats.org/officeDocument/2006/relationships" xmlns:p="http://schemas.openxmlformats.org/presentationml/2006/main">
-  <p:cSld>
-    <p:spTree>
-      <p:nvGrpSpPr>
-        <p:cNvPr id="1" name=""/>
-        <p:cNvGrpSpPr/>
-        <p:nvPr/>
-      </p:nvGrpSpPr>
-      <p:grpSpPr>
-        <a:xfrm>
-          <a:off x="0" y="0"/>
-          <a:ext cx="0" cy="0"/>
-          <a:chOff x="0" y="0"/>
-          <a:chExt cx="0" cy="0"/>
-        </a:xfrm>
-      </p:grpSpPr>
-      <p:sp>
-        <p:nvSpPr>
-          <p:cNvPr id="2" name="Title 1"/>
-          <p:cNvSpPr>
-            <a:spLocks noGrp="1"/>
-          </p:cNvSpPr>
-          <p:nvPr>
-            <p:ph type="title"/>
-          </p:nvPr>
-        </p:nvSpPr>
-        <p:spPr/>
-        <p:txBody>
-          <a:bodyPr/>
-          <a:lstStyle/>
-          <a:p>
-            <a:r>
-              <a:rPr lang="en-US" dirty="0"/>
-              <a:t>Question  223.4.5     123.22.1</a:t>
-            </a:r>
-          </a:p>
-        </p:txBody>
-      </p:sp>
-      <p:sp>
-        <p:nvSpPr>
-          <p:cNvPr id="3" name="Content Placeholder 2"/>
-          <p:cNvSpPr>
-            <a:spLocks noGrp="1"/>
-          </p:cNvSpPr>
-          <p:nvPr>
-            <p:ph idx="1"/>
-          </p:nvPr>
-        </p:nvSpPr>
-        <p:spPr/>
-        <p:txBody>
-          <a:bodyPr/>
-          <a:lstStyle/>
-          <a:p>
-            <a:pPr>
-              <a:buNone/>
-            </a:pPr>
-            <a:r>
-              <a:rPr lang="en-US" dirty="0"/>
-              <a:t>A 60W light bulb is allowed to burn for 3600s. How much energy has been used?</a:t>
-            </a:r>
-          </a:p>
-          <a:p>
-            <a:pPr marL="514350" indent="-514350">
-              <a:buFont typeface="+mj-lt"/>
-              <a:buAutoNum type="alphaLcParenR"/>
-            </a:pPr>
-            <a:r>
-              <a:rPr lang="en-US" dirty="0"/>
-              <a:t>36000J</a:t>
-            </a:r>
-          </a:p>
-          <a:p>
-            <a:pPr marL="514350" indent="-514350">
-              <a:buFont typeface="+mj-lt"/>
-              <a:buAutoNum type="alphaLcParenR"/>
-            </a:pPr>
-            <a:r>
-              <a:rPr lang="en-US" dirty="0"/>
-              <a:t>72000J</a:t>
-            </a:r>
-          </a:p>
-          <a:p>
-            <a:pPr marL="514350" indent="-514350">
-              <a:buFont typeface="+mj-lt"/>
-              <a:buAutoNum type="alphaLcParenR"/>
-            </a:pPr>
-            <a:r>
-              <a:rPr lang="en-US" dirty="0"/>
-              <a:t>144000J</a:t>
-            </a:r>
-          </a:p>
-          <a:p>
-            <a:pPr marL="514350" indent="-514350">
-              <a:buFont typeface="+mj-lt"/>
-              <a:buAutoNum type="alphaLcParenR"/>
-            </a:pPr>
-            <a:r>
-              <a:rPr lang="en-US" dirty="0"/>
-              <a:t>216000J</a:t>
-            </a:r>
-          </a:p>
-          <a:p>
-            <a:pPr marL="514350" indent="-514350">
-              <a:buFont typeface="+mj-lt"/>
-              <a:buAutoNum type="alphaLcParenR"/>
-            </a:pPr>
-            <a:r>
-              <a:rPr lang="en-US" dirty="0"/>
-              <a:t>5400000J</a:t>
-            </a:r>
-          </a:p>
-          <a:p>
-            <a:pPr>
-              <a:buNone/>
-            </a:pPr>
-            <a:endParaRPr lang="en-US" dirty="0"/>
-          </a:p>
-        </p:txBody>
-      </p:sp>
-      <p:sp>
-        <p:nvSpPr>
-          <p:cNvPr id="4" name="Slide Number Placeholder 3"/>
-          <p:cNvSpPr>
-            <a:spLocks noGrp="1"/>
-          </p:cNvSpPr>
-          <p:nvPr>
-            <p:ph type="sldNum" sz="quarter" idx="12"/>
-          </p:nvPr>
-        </p:nvSpPr>
-        <p:spPr/>
-        <p:txBody>
-          <a:bodyPr/>
-          <a:lstStyle/>
-          <a:p>
-            <a:pPr>
-              <a:defRPr/>
-            </a:pPr>
-            <a:fld id="{64137B81-8888-4253-92EC-0AED2A590749}" type="slidenum">
-              <a:rPr lang="en-US" smtClean="0"/>
-              <a:pPr>
-                <a:defRPr/>
-              </a:pPr>
-              <a:t>4</a:t>
-            </a:fld>
-            <a:endParaRPr lang="en-US"/>
-          </a:p>
-        </p:txBody>
-      </p:sp>
-    </p:spTree>
-    <p:extLst>
-      <p:ext uri="{BB962C8B-B14F-4D97-AF65-F5344CB8AC3E}">
-        <p14:creationId xmlns:p14="http://schemas.microsoft.com/office/powerpoint/2010/main" val="1716686287"/>
-      </p:ext>
-    </p:extLst>
-  </p:cSld>
-  <p:clrMapOvr>
-    <a:masterClrMapping/>
-  </p:clrMapOvr>
-</p:sld>
-</file>
-
-<file path=ppt/slides/slide40.xml><?xml version="1.0" encoding="utf-8"?>
+<file path=ppt/slides/slide41.xml><?xml version="1.0" encoding="utf-8"?>
 <p:sld xmlns:a="http://schemas.openxmlformats.org/drawingml/2006/main" xmlns:r="http://schemas.openxmlformats.org/officeDocument/2006/relationships" xmlns:p="http://schemas.openxmlformats.org/presentationml/2006/main">
   <p:cSld>
     <p:spTree>
@@ -21246,7 +21372,7 @@
 </p:sld>
 </file>
 
-<file path=ppt/slides/slide41.xml><?xml version="1.0" encoding="utf-8"?>
+<file path=ppt/slides/slide42.xml><?xml version="1.0" encoding="utf-8"?>
 <p:sld xmlns:a="http://schemas.openxmlformats.org/drawingml/2006/main" xmlns:r="http://schemas.openxmlformats.org/officeDocument/2006/relationships" xmlns:p="http://schemas.openxmlformats.org/presentationml/2006/main">
   <p:cSld>
     <p:spTree>
@@ -21481,7 +21607,7 @@
 </p:sld>
 </file>
 
-<file path=ppt/slides/slide42.xml><?xml version="1.0" encoding="utf-8"?>
+<file path=ppt/slides/slide43.xml><?xml version="1.0" encoding="utf-8"?>
 <p:sld xmlns:a="http://schemas.openxmlformats.org/drawingml/2006/main" xmlns:r="http://schemas.openxmlformats.org/officeDocument/2006/relationships" xmlns:p="http://schemas.openxmlformats.org/presentationml/2006/main">
   <p:cSld>
     <p:spTree>
@@ -21543,7 +21669,7 @@
 </p:sld>
 </file>
 
-<file path=ppt/slides/slide43.xml><?xml version="1.0" encoding="utf-8"?>
+<file path=ppt/slides/slide44.xml><?xml version="1.0" encoding="utf-8"?>
 <p:sld xmlns:a="http://schemas.openxmlformats.org/drawingml/2006/main" xmlns:r="http://schemas.openxmlformats.org/officeDocument/2006/relationships" xmlns:p="http://schemas.openxmlformats.org/presentationml/2006/main">
   <p:cSld>
     <p:spTree>
@@ -21599,7 +21725,7 @@
 </p:sld>
 </file>
 
-<file path=ppt/slides/slide44.xml><?xml version="1.0" encoding="utf-8"?>
+<file path=ppt/slides/slide45.xml><?xml version="1.0" encoding="utf-8"?>
 <p:sld xmlns:a="http://schemas.openxmlformats.org/drawingml/2006/main" xmlns:r="http://schemas.openxmlformats.org/officeDocument/2006/relationships" xmlns:p="http://schemas.openxmlformats.org/presentationml/2006/main">
   <p:cSld>
     <p:spTree>
@@ -21655,7 +21781,7 @@
 </p:sld>
 </file>
 
-<file path=ppt/slides/slide45.xml><?xml version="1.0" encoding="utf-8"?>
+<file path=ppt/slides/slide46.xml><?xml version="1.0" encoding="utf-8"?>
 <p:sld xmlns:a="http://schemas.openxmlformats.org/drawingml/2006/main" xmlns:r="http://schemas.openxmlformats.org/officeDocument/2006/relationships" xmlns:p="http://schemas.openxmlformats.org/presentationml/2006/main">
   <p:cSld>
     <p:spTree>
@@ -21800,7 +21926,7 @@
             <a:fld id="{85539879-F00E-4549-815A-3F0634DD4490}" type="slidenum">
               <a:rPr lang="en-US" smtClean="0"/>
               <a:pPr/>
-              <a:t>45</a:t>
+              <a:t>46</a:t>
             </a:fld>
             <a:endParaRPr lang="en-US"/>
           </a:p>
@@ -21819,7 +21945,7 @@
 </p:sld>
 </file>
 
-<file path=ppt/slides/slide46.xml><?xml version="1.0" encoding="utf-8"?>
+<file path=ppt/slides/slide47.xml><?xml version="1.0" encoding="utf-8"?>
 <p:sld xmlns:a="http://schemas.openxmlformats.org/drawingml/2006/main" xmlns:r="http://schemas.openxmlformats.org/officeDocument/2006/relationships" xmlns:p="http://schemas.openxmlformats.org/presentationml/2006/main">
   <p:cSld>
     <p:spTree>
@@ -21980,7 +22106,7 @@
 </p:sld>
 </file>
 
-<file path=ppt/slides/slide47.xml><?xml version="1.0" encoding="utf-8"?>
+<file path=ppt/slides/slide48.xml><?xml version="1.0" encoding="utf-8"?>
 <p:sld xmlns:a="http://schemas.openxmlformats.org/drawingml/2006/main" xmlns:r="http://schemas.openxmlformats.org/officeDocument/2006/relationships" xmlns:p="http://schemas.openxmlformats.org/presentationml/2006/main">
   <p:cSld>
     <p:spTree>
@@ -22169,7 +22295,7 @@
 </p:sld>
 </file>
 
-<file path=ppt/slides/slide48.xml><?xml version="1.0" encoding="utf-8"?>
+<file path=ppt/slides/slide49.xml><?xml version="1.0" encoding="utf-8"?>
 <p:sld xmlns:a="http://schemas.openxmlformats.org/drawingml/2006/main" xmlns:r="http://schemas.openxmlformats.org/officeDocument/2006/relationships" xmlns:p="http://schemas.openxmlformats.org/presentationml/2006/main">
   <p:cSld>
     <p:spTree>
@@ -22358,139 +22484,6 @@
 </p:sld>
 </file>
 
-<file path=ppt/slides/slide49.xml><?xml version="1.0" encoding="utf-8"?>
-<p:sld xmlns:a="http://schemas.openxmlformats.org/drawingml/2006/main" xmlns:r="http://schemas.openxmlformats.org/officeDocument/2006/relationships" xmlns:p="http://schemas.openxmlformats.org/presentationml/2006/main">
-  <p:cSld>
-    <p:spTree>
-      <p:nvGrpSpPr>
-        <p:cNvPr id="1" name=""/>
-        <p:cNvGrpSpPr/>
-        <p:nvPr/>
-      </p:nvGrpSpPr>
-      <p:grpSpPr>
-        <a:xfrm>
-          <a:off x="0" y="0"/>
-          <a:ext cx="0" cy="0"/>
-          <a:chOff x="0" y="0"/>
-          <a:chExt cx="0" cy="0"/>
-        </a:xfrm>
-      </p:grpSpPr>
-      <p:sp>
-        <p:nvSpPr>
-          <p:cNvPr id="2" name="Title 1"/>
-          <p:cNvSpPr>
-            <a:spLocks noGrp="1"/>
-          </p:cNvSpPr>
-          <p:nvPr>
-            <p:ph type="title"/>
-          </p:nvPr>
-        </p:nvSpPr>
-        <p:spPr/>
-        <p:txBody>
-          <a:bodyPr/>
-          <a:lstStyle/>
-          <a:p>
-            <a:r>
-              <a:rPr lang="en-US" dirty="0"/>
-              <a:t>Question 223.6.0.1</a:t>
-            </a:r>
-          </a:p>
-        </p:txBody>
-      </p:sp>
-      <p:sp>
-        <p:nvSpPr>
-          <p:cNvPr id="3" name="Content Placeholder 2"/>
-          <p:cNvSpPr>
-            <a:spLocks noGrp="1"/>
-          </p:cNvSpPr>
-          <p:nvPr>
-            <p:ph idx="1"/>
-          </p:nvPr>
-        </p:nvSpPr>
-        <p:spPr/>
-        <p:txBody>
-          <a:bodyPr/>
-          <a:lstStyle/>
-          <a:p>
-            <a:pPr marL="0" indent="0">
-              <a:buNone/>
-            </a:pPr>
-            <a:r>
-              <a:rPr lang="en-US" dirty="0"/>
-              <a:t>I have two sinusoidal waves in the same medium. The waves travel the same direction (unlike our class demonstration).  If the resultant wave has a larger amplitude than the original waves we call this…</a:t>
-            </a:r>
-          </a:p>
-          <a:p>
-            <a:pPr marL="514350" indent="-514350">
-              <a:buAutoNum type="alphaLcParenR"/>
-            </a:pPr>
-            <a:r>
-              <a:rPr lang="en-US" dirty="0"/>
-              <a:t>Constructive interference</a:t>
-            </a:r>
-          </a:p>
-          <a:p>
-            <a:pPr marL="514350" indent="-514350">
-              <a:buAutoNum type="alphaLcParenR"/>
-            </a:pPr>
-            <a:r>
-              <a:rPr lang="en-US" dirty="0"/>
-              <a:t>Destructive interference</a:t>
-            </a:r>
-          </a:p>
-          <a:p>
-            <a:pPr marL="514350" indent="-514350">
-              <a:buAutoNum type="alphaLcParenR"/>
-            </a:pPr>
-            <a:r>
-              <a:rPr lang="en-US" dirty="0"/>
-              <a:t>A miracle</a:t>
-            </a:r>
-          </a:p>
-        </p:txBody>
-      </p:sp>
-      <p:sp>
-        <p:nvSpPr>
-          <p:cNvPr id="4" name="Slide Number Placeholder 3"/>
-          <p:cNvSpPr>
-            <a:spLocks noGrp="1"/>
-          </p:cNvSpPr>
-          <p:nvPr>
-            <p:ph type="sldNum" sz="quarter" idx="12"/>
-          </p:nvPr>
-        </p:nvSpPr>
-        <p:spPr/>
-        <p:txBody>
-          <a:bodyPr/>
-          <a:lstStyle/>
-          <a:p>
-            <a:pPr>
-              <a:defRPr/>
-            </a:pPr>
-            <a:fld id="{64137B81-8888-4253-92EC-0AED2A590749}" type="slidenum">
-              <a:rPr lang="en-US" smtClean="0"/>
-              <a:pPr>
-                <a:defRPr/>
-              </a:pPr>
-              <a:t>49</a:t>
-            </a:fld>
-            <a:endParaRPr lang="en-US"/>
-          </a:p>
-        </p:txBody>
-      </p:sp>
-    </p:spTree>
-    <p:extLst>
-      <p:ext uri="{BB962C8B-B14F-4D97-AF65-F5344CB8AC3E}">
-        <p14:creationId xmlns:p14="http://schemas.microsoft.com/office/powerpoint/2010/main" val="1497180699"/>
-      </p:ext>
-    </p:extLst>
-  </p:cSld>
-  <p:clrMapOvr>
-    <a:masterClrMapping/>
-  </p:clrMapOvr>
-</p:sld>
-</file>
-
 <file path=ppt/slides/slide5.xml><?xml version="1.0" encoding="utf-8"?>
 <p:sld xmlns:a="http://schemas.openxmlformats.org/drawingml/2006/main" xmlns:r="http://schemas.openxmlformats.org/officeDocument/2006/relationships" xmlns:p="http://schemas.openxmlformats.org/presentationml/2006/main">
   <p:cSld>
@@ -22656,7 +22649,7 @@
           <a:p>
             <a:r>
               <a:rPr lang="en-US" dirty="0"/>
-              <a:t>Question 223.6.0.2</a:t>
+              <a:t>Question 223.6.0.1</a:t>
             </a:r>
           </a:p>
         </p:txBody>
@@ -22681,7 +22674,7 @@
             </a:pPr>
             <a:r>
               <a:rPr lang="en-US" dirty="0"/>
-              <a:t>I have two sinusoidal waves in the same medium. The waves travel the same direction (unlike our class demonstration).  If the resultant wave has a smaller amplitude than the original waves we call this…</a:t>
+              <a:t>I have two sinusoidal waves in the same medium. The waves travel the same direction (unlike our class demonstration).  If the resultant wave has a larger amplitude than the original waves we call this…</a:t>
             </a:r>
           </a:p>
           <a:p>
@@ -22708,7 +22701,7 @@
             </a:pPr>
             <a:r>
               <a:rPr lang="en-US" dirty="0"/>
-              <a:t>Depressing</a:t>
+              <a:t>A miracle</a:t>
             </a:r>
           </a:p>
         </p:txBody>
@@ -22745,7 +22738,7 @@
     </p:spTree>
     <p:extLst>
       <p:ext uri="{BB962C8B-B14F-4D97-AF65-F5344CB8AC3E}">
-        <p14:creationId xmlns:p14="http://schemas.microsoft.com/office/powerpoint/2010/main" val="4119617871"/>
+        <p14:creationId xmlns:p14="http://schemas.microsoft.com/office/powerpoint/2010/main" val="1497180699"/>
       </p:ext>
     </p:extLst>
   </p:cSld>
@@ -22789,6 +22782,139 @@
           <a:p>
             <a:r>
               <a:rPr lang="en-US" dirty="0"/>
+              <a:t>Question 223.6.0.2</a:t>
+            </a:r>
+          </a:p>
+        </p:txBody>
+      </p:sp>
+      <p:sp>
+        <p:nvSpPr>
+          <p:cNvPr id="3" name="Content Placeholder 2"/>
+          <p:cNvSpPr>
+            <a:spLocks noGrp="1"/>
+          </p:cNvSpPr>
+          <p:nvPr>
+            <p:ph idx="1"/>
+          </p:nvPr>
+        </p:nvSpPr>
+        <p:spPr/>
+        <p:txBody>
+          <a:bodyPr/>
+          <a:lstStyle/>
+          <a:p>
+            <a:pPr marL="0" indent="0">
+              <a:buNone/>
+            </a:pPr>
+            <a:r>
+              <a:rPr lang="en-US" dirty="0"/>
+              <a:t>I have two sinusoidal waves in the same medium. The waves travel the same direction (unlike our class demonstration).  If the resultant wave has a smaller amplitude than the original waves we call this…</a:t>
+            </a:r>
+          </a:p>
+          <a:p>
+            <a:pPr marL="514350" indent="-514350">
+              <a:buAutoNum type="alphaLcParenR"/>
+            </a:pPr>
+            <a:r>
+              <a:rPr lang="en-US" dirty="0"/>
+              <a:t>Constructive interference</a:t>
+            </a:r>
+          </a:p>
+          <a:p>
+            <a:pPr marL="514350" indent="-514350">
+              <a:buAutoNum type="alphaLcParenR"/>
+            </a:pPr>
+            <a:r>
+              <a:rPr lang="en-US" dirty="0"/>
+              <a:t>Destructive interference</a:t>
+            </a:r>
+          </a:p>
+          <a:p>
+            <a:pPr marL="514350" indent="-514350">
+              <a:buAutoNum type="alphaLcParenR"/>
+            </a:pPr>
+            <a:r>
+              <a:rPr lang="en-US" dirty="0"/>
+              <a:t>Depressing</a:t>
+            </a:r>
+          </a:p>
+        </p:txBody>
+      </p:sp>
+      <p:sp>
+        <p:nvSpPr>
+          <p:cNvPr id="4" name="Slide Number Placeholder 3"/>
+          <p:cNvSpPr>
+            <a:spLocks noGrp="1"/>
+          </p:cNvSpPr>
+          <p:nvPr>
+            <p:ph type="sldNum" sz="quarter" idx="12"/>
+          </p:nvPr>
+        </p:nvSpPr>
+        <p:spPr/>
+        <p:txBody>
+          <a:bodyPr/>
+          <a:lstStyle/>
+          <a:p>
+            <a:pPr>
+              <a:defRPr/>
+            </a:pPr>
+            <a:fld id="{64137B81-8888-4253-92EC-0AED2A590749}" type="slidenum">
+              <a:rPr lang="en-US" smtClean="0"/>
+              <a:pPr>
+                <a:defRPr/>
+              </a:pPr>
+              <a:t>51</a:t>
+            </a:fld>
+            <a:endParaRPr lang="en-US"/>
+          </a:p>
+        </p:txBody>
+      </p:sp>
+    </p:spTree>
+    <p:extLst>
+      <p:ext uri="{BB962C8B-B14F-4D97-AF65-F5344CB8AC3E}">
+        <p14:creationId xmlns:p14="http://schemas.microsoft.com/office/powerpoint/2010/main" val="4119617871"/>
+      </p:ext>
+    </p:extLst>
+  </p:cSld>
+  <p:clrMapOvr>
+    <a:masterClrMapping/>
+  </p:clrMapOvr>
+</p:sld>
+</file>
+
+<file path=ppt/slides/slide52.xml><?xml version="1.0" encoding="utf-8"?>
+<p:sld xmlns:a="http://schemas.openxmlformats.org/drawingml/2006/main" xmlns:r="http://schemas.openxmlformats.org/officeDocument/2006/relationships" xmlns:p="http://schemas.openxmlformats.org/presentationml/2006/main">
+  <p:cSld>
+    <p:spTree>
+      <p:nvGrpSpPr>
+        <p:cNvPr id="1" name=""/>
+        <p:cNvGrpSpPr/>
+        <p:nvPr/>
+      </p:nvGrpSpPr>
+      <p:grpSpPr>
+        <a:xfrm>
+          <a:off x="0" y="0"/>
+          <a:ext cx="0" cy="0"/>
+          <a:chOff x="0" y="0"/>
+          <a:chExt cx="0" cy="0"/>
+        </a:xfrm>
+      </p:grpSpPr>
+      <p:sp>
+        <p:nvSpPr>
+          <p:cNvPr id="2" name="Title 1"/>
+          <p:cNvSpPr>
+            <a:spLocks noGrp="1"/>
+          </p:cNvSpPr>
+          <p:nvPr>
+            <p:ph type="title"/>
+          </p:nvPr>
+        </p:nvSpPr>
+        <p:spPr/>
+        <p:txBody>
+          <a:bodyPr/>
+          <a:lstStyle/>
+          <a:p>
+            <a:r>
+              <a:rPr lang="en-US" dirty="0"/>
               <a:t>Question 223.6.0.3</a:t>
             </a:r>
           </a:p>
@@ -22880,7 +23006,7 @@
               <a:pPr>
                 <a:defRPr/>
               </a:pPr>
-              <a:t>51</a:t>
+              <a:t>52</a:t>
             </a:fld>
             <a:endParaRPr lang="en-US"/>
           </a:p>
@@ -22899,7 +23025,7 @@
 </p:sld>
 </file>
 
-<file path=ppt/slides/slide52.xml><?xml version="1.0" encoding="utf-8"?>
+<file path=ppt/slides/slide53.xml><?xml version="1.0" encoding="utf-8"?>
 <p:sld xmlns:a="http://schemas.openxmlformats.org/drawingml/2006/main" xmlns:r="http://schemas.openxmlformats.org/officeDocument/2006/relationships" xmlns:p="http://schemas.openxmlformats.org/presentationml/2006/main">
   <p:cSld>
     <p:spTree>
@@ -23484,7 +23610,7 @@
 </p:sld>
 </file>
 
-<file path=ppt/slides/slide53.xml><?xml version="1.0" encoding="utf-8"?>
+<file path=ppt/slides/slide54.xml><?xml version="1.0" encoding="utf-8"?>
 <p:sld xmlns:a="http://schemas.openxmlformats.org/drawingml/2006/main" xmlns:r="http://schemas.openxmlformats.org/officeDocument/2006/relationships" xmlns:p="http://schemas.openxmlformats.org/presentationml/2006/main">
   <p:cSld>
     <p:spTree>
@@ -23693,7 +23819,7 @@
 </p:sld>
 </file>
 
-<file path=ppt/slides/slide54.xml><?xml version="1.0" encoding="utf-8"?>
+<file path=ppt/slides/slide55.xml><?xml version="1.0" encoding="utf-8"?>
 <p:sld xmlns:a="http://schemas.openxmlformats.org/drawingml/2006/main" xmlns:r="http://schemas.openxmlformats.org/officeDocument/2006/relationships" xmlns:p="http://schemas.openxmlformats.org/presentationml/2006/main">
   <p:cSld>
     <p:spTree>
@@ -23962,7 +24088,7 @@
 </p:sld>
 </file>
 
-<file path=ppt/slides/slide55.xml><?xml version="1.0" encoding="utf-8"?>
+<file path=ppt/slides/slide56.xml><?xml version="1.0" encoding="utf-8"?>
 <p:sld xmlns:a="http://schemas.openxmlformats.org/drawingml/2006/main" xmlns:r="http://schemas.openxmlformats.org/officeDocument/2006/relationships" xmlns:p="http://schemas.openxmlformats.org/presentationml/2006/main">
   <p:cSld>
     <p:spTree>
@@ -24885,7 +25011,7 @@
 </p:sld>
 </file>
 
-<file path=ppt/slides/slide56.xml><?xml version="1.0" encoding="utf-8"?>
+<file path=ppt/slides/slide57.xml><?xml version="1.0" encoding="utf-8"?>
 <p:sld xmlns:a="http://schemas.openxmlformats.org/drawingml/2006/main" xmlns:r="http://schemas.openxmlformats.org/officeDocument/2006/relationships" xmlns:p="http://schemas.openxmlformats.org/presentationml/2006/main">
   <p:cSld>
     <p:spTree>
@@ -25882,7 +26008,7 @@
 </p:sld>
 </file>
 
-<file path=ppt/slides/slide57.xml><?xml version="1.0" encoding="utf-8"?>
+<file path=ppt/slides/slide58.xml><?xml version="1.0" encoding="utf-8"?>
 <p:sld xmlns:a="http://schemas.openxmlformats.org/drawingml/2006/main" xmlns:r="http://schemas.openxmlformats.org/officeDocument/2006/relationships" xmlns:p="http://schemas.openxmlformats.org/presentationml/2006/main">
   <p:cSld>
     <p:spTree>
@@ -27477,7 +27603,7 @@
 </p:sld>
 </file>
 
-<file path=ppt/slides/slide58.xml><?xml version="1.0" encoding="utf-8"?>
+<file path=ppt/slides/slide59.xml><?xml version="1.0" encoding="utf-8"?>
 <p:sld xmlns:a="http://schemas.openxmlformats.org/drawingml/2006/main" xmlns:r="http://schemas.openxmlformats.org/officeDocument/2006/relationships" xmlns:p="http://schemas.openxmlformats.org/presentationml/2006/main">
   <p:cSld>
     <p:spTree>
@@ -28474,7 +28600,155 @@
 </p:sld>
 </file>
 
-<file path=ppt/slides/slide59.xml><?xml version="1.0" encoding="utf-8"?>
+<file path=ppt/slides/slide6.xml><?xml version="1.0" encoding="utf-8"?>
+<p:sld xmlns:a="http://schemas.openxmlformats.org/drawingml/2006/main" xmlns:r="http://schemas.openxmlformats.org/officeDocument/2006/relationships" xmlns:p="http://schemas.openxmlformats.org/presentationml/2006/main">
+  <p:cSld>
+    <p:spTree>
+      <p:nvGrpSpPr>
+        <p:cNvPr id="1" name=""/>
+        <p:cNvGrpSpPr/>
+        <p:nvPr/>
+      </p:nvGrpSpPr>
+      <p:grpSpPr>
+        <a:xfrm>
+          <a:off x="0" y="0"/>
+          <a:ext cx="0" cy="0"/>
+          <a:chOff x="0" y="0"/>
+          <a:chExt cx="0" cy="0"/>
+        </a:xfrm>
+      </p:grpSpPr>
+      <p:sp>
+        <p:nvSpPr>
+          <p:cNvPr id="62467" name="Rectangle 2"/>
+          <p:cNvSpPr>
+            <a:spLocks noGrp="1" noChangeArrowheads="1"/>
+          </p:cNvSpPr>
+          <p:nvPr>
+            <p:ph type="title"/>
+          </p:nvPr>
+        </p:nvSpPr>
+        <p:spPr/>
+        <p:txBody>
+          <a:bodyPr/>
+          <a:lstStyle/>
+          <a:p>
+            <a:r>
+              <a:rPr lang="en-US" dirty="0"/>
+              <a:t>Question 223.4.8  123.22.4</a:t>
+            </a:r>
+          </a:p>
+        </p:txBody>
+      </p:sp>
+      <p:sp>
+        <p:nvSpPr>
+          <p:cNvPr id="62468" name="Rectangle 3"/>
+          <p:cNvSpPr>
+            <a:spLocks noGrp="1" noChangeArrowheads="1"/>
+          </p:cNvSpPr>
+          <p:nvPr>
+            <p:ph idx="1"/>
+          </p:nvPr>
+        </p:nvSpPr>
+        <p:spPr/>
+        <p:txBody>
+          <a:bodyPr/>
+          <a:lstStyle/>
+          <a:p>
+            <a:pPr marL="609600" indent="-609600" eaLnBrk="1" hangingPunct="1">
+              <a:buFontTx/>
+              <a:buNone/>
+            </a:pPr>
+            <a:r>
+              <a:rPr lang="en-US" dirty="0"/>
+              <a:t>If you cup your hand to your ear, you can hear better. This is because</a:t>
+            </a:r>
+          </a:p>
+          <a:p>
+            <a:pPr marL="609600" indent="-609600" eaLnBrk="1" hangingPunct="1">
+              <a:buFontTx/>
+              <a:buAutoNum type="alphaLcParenR"/>
+            </a:pPr>
+            <a:r>
+              <a:rPr lang="en-US" dirty="0"/>
+              <a:t>You change the frequency of the sound with your hand</a:t>
+            </a:r>
+          </a:p>
+          <a:p>
+            <a:pPr marL="609600" indent="-609600" eaLnBrk="1" hangingPunct="1">
+              <a:buFontTx/>
+              <a:buAutoNum type="alphaLcParenR"/>
+            </a:pPr>
+            <a:r>
+              <a:rPr lang="en-US" dirty="0"/>
+              <a:t>You increase the collection area</a:t>
+            </a:r>
+          </a:p>
+          <a:p>
+            <a:pPr marL="609600" indent="-609600" eaLnBrk="1" hangingPunct="1">
+              <a:buFontTx/>
+              <a:buAutoNum type="alphaLcParenR"/>
+            </a:pPr>
+            <a:r>
+              <a:rPr lang="en-US" dirty="0"/>
+              <a:t>You increase the amplitude of the wave</a:t>
+            </a:r>
+          </a:p>
+          <a:p>
+            <a:pPr marL="609600" indent="-609600" eaLnBrk="1" hangingPunct="1">
+              <a:buFontTx/>
+              <a:buAutoNum type="alphaLcParenR"/>
+            </a:pPr>
+            <a:r>
+              <a:rPr lang="en-US" dirty="0"/>
+              <a:t>Can’t tell</a:t>
+            </a:r>
+          </a:p>
+          <a:p>
+            <a:pPr marL="609600" indent="-609600" eaLnBrk="1" hangingPunct="1"/>
+            <a:endParaRPr lang="en-US" dirty="0"/>
+          </a:p>
+        </p:txBody>
+      </p:sp>
+      <p:sp>
+        <p:nvSpPr>
+          <p:cNvPr id="62466" name="Slide Number Placeholder 5"/>
+          <p:cNvSpPr>
+            <a:spLocks noGrp="1"/>
+          </p:cNvSpPr>
+          <p:nvPr>
+            <p:ph type="sldNum" sz="quarter" idx="12"/>
+          </p:nvPr>
+        </p:nvSpPr>
+        <p:spPr>
+          <a:noFill/>
+        </p:spPr>
+        <p:txBody>
+          <a:bodyPr/>
+          <a:lstStyle/>
+          <a:p>
+            <a:fld id="{103EBA7D-9A04-4522-9A2F-EC8F4813A80C}" type="slidenum">
+              <a:rPr lang="en-US" smtClean="0"/>
+              <a:pPr/>
+              <a:t>6</a:t>
+            </a:fld>
+            <a:endParaRPr lang="en-US"/>
+          </a:p>
+        </p:txBody>
+      </p:sp>
+    </p:spTree>
+    <p:extLst>
+      <p:ext uri="{BB962C8B-B14F-4D97-AF65-F5344CB8AC3E}">
+        <p14:creationId xmlns:p14="http://schemas.microsoft.com/office/powerpoint/2010/main" val="3655656141"/>
+      </p:ext>
+    </p:extLst>
+  </p:cSld>
+  <p:clrMapOvr>
+    <a:masterClrMapping/>
+  </p:clrMapOvr>
+</p:sld>
+</file>
+
+<file path=ppt/slides/slide60.xml><?xml version="1.0" encoding="utf-8"?>
 <p:sld xmlns:a="http://schemas.openxmlformats.org/drawingml/2006/main" xmlns:r="http://schemas.openxmlformats.org/officeDocument/2006/relationships" xmlns:p="http://schemas.openxmlformats.org/presentationml/2006/main">
   <p:cSld>
     <p:spTree>
@@ -29723,155 +29997,7 @@
 </p:sld>
 </file>
 
-<file path=ppt/slides/slide6.xml><?xml version="1.0" encoding="utf-8"?>
-<p:sld xmlns:a="http://schemas.openxmlformats.org/drawingml/2006/main" xmlns:r="http://schemas.openxmlformats.org/officeDocument/2006/relationships" xmlns:p="http://schemas.openxmlformats.org/presentationml/2006/main">
-  <p:cSld>
-    <p:spTree>
-      <p:nvGrpSpPr>
-        <p:cNvPr id="1" name=""/>
-        <p:cNvGrpSpPr/>
-        <p:nvPr/>
-      </p:nvGrpSpPr>
-      <p:grpSpPr>
-        <a:xfrm>
-          <a:off x="0" y="0"/>
-          <a:ext cx="0" cy="0"/>
-          <a:chOff x="0" y="0"/>
-          <a:chExt cx="0" cy="0"/>
-        </a:xfrm>
-      </p:grpSpPr>
-      <p:sp>
-        <p:nvSpPr>
-          <p:cNvPr id="62467" name="Rectangle 2"/>
-          <p:cNvSpPr>
-            <a:spLocks noGrp="1" noChangeArrowheads="1"/>
-          </p:cNvSpPr>
-          <p:nvPr>
-            <p:ph type="title"/>
-          </p:nvPr>
-        </p:nvSpPr>
-        <p:spPr/>
-        <p:txBody>
-          <a:bodyPr/>
-          <a:lstStyle/>
-          <a:p>
-            <a:r>
-              <a:rPr lang="en-US" dirty="0"/>
-              <a:t>Question 223.4.8  123.22.4</a:t>
-            </a:r>
-          </a:p>
-        </p:txBody>
-      </p:sp>
-      <p:sp>
-        <p:nvSpPr>
-          <p:cNvPr id="62468" name="Rectangle 3"/>
-          <p:cNvSpPr>
-            <a:spLocks noGrp="1" noChangeArrowheads="1"/>
-          </p:cNvSpPr>
-          <p:nvPr>
-            <p:ph idx="1"/>
-          </p:nvPr>
-        </p:nvSpPr>
-        <p:spPr/>
-        <p:txBody>
-          <a:bodyPr/>
-          <a:lstStyle/>
-          <a:p>
-            <a:pPr marL="609600" indent="-609600" eaLnBrk="1" hangingPunct="1">
-              <a:buFontTx/>
-              <a:buNone/>
-            </a:pPr>
-            <a:r>
-              <a:rPr lang="en-US" dirty="0"/>
-              <a:t>If you cup your hand to your ear, you can hear better. This is because</a:t>
-            </a:r>
-          </a:p>
-          <a:p>
-            <a:pPr marL="609600" indent="-609600" eaLnBrk="1" hangingPunct="1">
-              <a:buFontTx/>
-              <a:buAutoNum type="alphaLcParenR"/>
-            </a:pPr>
-            <a:r>
-              <a:rPr lang="en-US" dirty="0"/>
-              <a:t>You change the frequency of the sound with your hand</a:t>
-            </a:r>
-          </a:p>
-          <a:p>
-            <a:pPr marL="609600" indent="-609600" eaLnBrk="1" hangingPunct="1">
-              <a:buFontTx/>
-              <a:buAutoNum type="alphaLcParenR"/>
-            </a:pPr>
-            <a:r>
-              <a:rPr lang="en-US" dirty="0"/>
-              <a:t>You increase the collection area</a:t>
-            </a:r>
-          </a:p>
-          <a:p>
-            <a:pPr marL="609600" indent="-609600" eaLnBrk="1" hangingPunct="1">
-              <a:buFontTx/>
-              <a:buAutoNum type="alphaLcParenR"/>
-            </a:pPr>
-            <a:r>
-              <a:rPr lang="en-US" dirty="0"/>
-              <a:t>You increase the amplitude of the wave</a:t>
-            </a:r>
-          </a:p>
-          <a:p>
-            <a:pPr marL="609600" indent="-609600" eaLnBrk="1" hangingPunct="1">
-              <a:buFontTx/>
-              <a:buAutoNum type="alphaLcParenR"/>
-            </a:pPr>
-            <a:r>
-              <a:rPr lang="en-US" dirty="0"/>
-              <a:t>Can’t tell</a:t>
-            </a:r>
-          </a:p>
-          <a:p>
-            <a:pPr marL="609600" indent="-609600" eaLnBrk="1" hangingPunct="1"/>
-            <a:endParaRPr lang="en-US" dirty="0"/>
-          </a:p>
-        </p:txBody>
-      </p:sp>
-      <p:sp>
-        <p:nvSpPr>
-          <p:cNvPr id="62466" name="Slide Number Placeholder 5"/>
-          <p:cNvSpPr>
-            <a:spLocks noGrp="1"/>
-          </p:cNvSpPr>
-          <p:nvPr>
-            <p:ph type="sldNum" sz="quarter" idx="12"/>
-          </p:nvPr>
-        </p:nvSpPr>
-        <p:spPr>
-          <a:noFill/>
-        </p:spPr>
-        <p:txBody>
-          <a:bodyPr/>
-          <a:lstStyle/>
-          <a:p>
-            <a:fld id="{103EBA7D-9A04-4522-9A2F-EC8F4813A80C}" type="slidenum">
-              <a:rPr lang="en-US" smtClean="0"/>
-              <a:pPr/>
-              <a:t>6</a:t>
-            </a:fld>
-            <a:endParaRPr lang="en-US"/>
-          </a:p>
-        </p:txBody>
-      </p:sp>
-    </p:spTree>
-    <p:extLst>
-      <p:ext uri="{BB962C8B-B14F-4D97-AF65-F5344CB8AC3E}">
-        <p14:creationId xmlns:p14="http://schemas.microsoft.com/office/powerpoint/2010/main" val="3655656141"/>
-      </p:ext>
-    </p:extLst>
-  </p:cSld>
-  <p:clrMapOvr>
-    <a:masterClrMapping/>
-  </p:clrMapOvr>
-</p:sld>
-</file>
-
-<file path=ppt/slides/slide60.xml><?xml version="1.0" encoding="utf-8"?>
+<file path=ppt/slides/slide61.xml><?xml version="1.0" encoding="utf-8"?>
 <p:sld xmlns:a="http://schemas.openxmlformats.org/drawingml/2006/main" xmlns:r="http://schemas.openxmlformats.org/officeDocument/2006/relationships" xmlns:p="http://schemas.openxmlformats.org/presentationml/2006/main">
   <p:cSld>
     <p:spTree>
@@ -29994,7 +30120,7 @@
 </p:sld>
 </file>
 
-<file path=ppt/slides/slide61.xml><?xml version="1.0" encoding="utf-8"?>
+<file path=ppt/slides/slide62.xml><?xml version="1.0" encoding="utf-8"?>
 <p:sld xmlns:a="http://schemas.openxmlformats.org/drawingml/2006/main" xmlns:r="http://schemas.openxmlformats.org/officeDocument/2006/relationships" xmlns:p="http://schemas.openxmlformats.org/presentationml/2006/main">
   <p:cSld>
     <p:spTree>
@@ -30117,7 +30243,7 @@
 </p:sld>
 </file>
 
-<file path=ppt/slides/slide62.xml><?xml version="1.0" encoding="utf-8"?>
+<file path=ppt/slides/slide63.xml><?xml version="1.0" encoding="utf-8"?>
 <p:sld xmlns:a="http://schemas.openxmlformats.org/drawingml/2006/main" xmlns:r="http://schemas.openxmlformats.org/officeDocument/2006/relationships" xmlns:p="http://schemas.openxmlformats.org/presentationml/2006/main">
   <p:cSld>
     <p:spTree>
@@ -30876,7 +31002,7 @@
 </p:sld>
 </file>
 
-<file path=ppt/slides/slide63.xml><?xml version="1.0" encoding="utf-8"?>
+<file path=ppt/slides/slide64.xml><?xml version="1.0" encoding="utf-8"?>
 <p:sld xmlns:a="http://schemas.openxmlformats.org/drawingml/2006/main" xmlns:r="http://schemas.openxmlformats.org/officeDocument/2006/relationships" xmlns:p="http://schemas.openxmlformats.org/presentationml/2006/main">
   <p:cSld>
     <p:spTree>
@@ -30959,7 +31085,7 @@
 </p:sld>
 </file>
 
-<file path=ppt/slides/slide64.xml><?xml version="1.0" encoding="utf-8"?>
+<file path=ppt/slides/slide65.xml><?xml version="1.0" encoding="utf-8"?>
 <p:sld xmlns:a="http://schemas.openxmlformats.org/drawingml/2006/main" xmlns:r="http://schemas.openxmlformats.org/officeDocument/2006/relationships" xmlns:p="http://schemas.openxmlformats.org/presentationml/2006/main">
   <p:cSld>
     <p:spTree>
@@ -31331,7 +31457,7 @@
 </p:sld>
 </file>
 
-<file path=ppt/slides/slide65.xml><?xml version="1.0" encoding="utf-8"?>
+<file path=ppt/slides/slide66.xml><?xml version="1.0" encoding="utf-8"?>
 <p:sld xmlns:a="http://schemas.openxmlformats.org/drawingml/2006/main" xmlns:r="http://schemas.openxmlformats.org/officeDocument/2006/relationships" xmlns:p="http://schemas.openxmlformats.org/presentationml/2006/main">
   <p:cSld>
     <p:spTree>
@@ -31454,7 +31580,7 @@
               <a:pPr>
                 <a:defRPr/>
               </a:pPr>
-              <a:t>65</a:t>
+              <a:t>66</a:t>
             </a:fld>
             <a:endParaRPr lang="en-US"/>
           </a:p>
@@ -31473,7 +31599,7 @@
 </p:sld>
 </file>
 
-<file path=ppt/slides/slide66.xml><?xml version="1.0" encoding="utf-8"?>
+<file path=ppt/slides/slide67.xml><?xml version="1.0" encoding="utf-8"?>
 <p:sld xmlns:a="http://schemas.openxmlformats.org/drawingml/2006/main" xmlns:r="http://schemas.openxmlformats.org/officeDocument/2006/relationships" xmlns:p="http://schemas.openxmlformats.org/presentationml/2006/main">
   <p:cSld>
     <p:spTree>
@@ -31591,7 +31717,7 @@
 </p:sld>
 </file>
 
-<file path=ppt/slides/slide67.xml><?xml version="1.0" encoding="utf-8"?>
+<file path=ppt/slides/slide68.xml><?xml version="1.0" encoding="utf-8"?>
 <p:sld xmlns:a="http://schemas.openxmlformats.org/drawingml/2006/main" xmlns:r="http://schemas.openxmlformats.org/officeDocument/2006/relationships" xmlns:p="http://schemas.openxmlformats.org/presentationml/2006/main">
   <p:cSld>
     <p:spTree>
@@ -31729,7 +31855,7 @@
 </p:sld>
 </file>
 
-<file path=ppt/slides/slide68.xml><?xml version="1.0" encoding="utf-8"?>
+<file path=ppt/slides/slide69.xml><?xml version="1.0" encoding="utf-8"?>
 <p:sld xmlns:a="http://schemas.openxmlformats.org/drawingml/2006/main" xmlns:r="http://schemas.openxmlformats.org/officeDocument/2006/relationships" xmlns:p="http://schemas.openxmlformats.org/presentationml/2006/main">
   <p:cSld>
     <p:spTree>
@@ -31838,134 +31964,6 @@
     <p:extLst>
       <p:ext uri="{BB962C8B-B14F-4D97-AF65-F5344CB8AC3E}">
         <p14:creationId xmlns:p14="http://schemas.microsoft.com/office/powerpoint/2010/main" val="2277089920"/>
-      </p:ext>
-    </p:extLst>
-  </p:cSld>
-  <p:clrMapOvr>
-    <a:masterClrMapping/>
-  </p:clrMapOvr>
-</p:sld>
-</file>
-
-<file path=ppt/slides/slide69.xml><?xml version="1.0" encoding="utf-8"?>
-<p:sld xmlns:a="http://schemas.openxmlformats.org/drawingml/2006/main" xmlns:r="http://schemas.openxmlformats.org/officeDocument/2006/relationships" xmlns:p="http://schemas.openxmlformats.org/presentationml/2006/main">
-  <p:cSld>
-    <p:spTree>
-      <p:nvGrpSpPr>
-        <p:cNvPr id="1" name=""/>
-        <p:cNvGrpSpPr/>
-        <p:nvPr/>
-      </p:nvGrpSpPr>
-      <p:grpSpPr>
-        <a:xfrm>
-          <a:off x="0" y="0"/>
-          <a:ext cx="0" cy="0"/>
-          <a:chOff x="0" y="0"/>
-          <a:chExt cx="0" cy="0"/>
-        </a:xfrm>
-      </p:grpSpPr>
-      <p:sp>
-        <p:nvSpPr>
-          <p:cNvPr id="547841" name="Title 1"/>
-          <p:cNvSpPr>
-            <a:spLocks noGrp="1"/>
-          </p:cNvSpPr>
-          <p:nvPr>
-            <p:ph type="title"/>
-          </p:nvPr>
-        </p:nvSpPr>
-        <p:spPr/>
-        <p:txBody>
-          <a:bodyPr/>
-          <a:lstStyle/>
-          <a:p>
-            <a:r>
-              <a:rPr lang="en-US" dirty="0"/>
-              <a:t>Question 223.4.13 123.22.9</a:t>
-            </a:r>
-          </a:p>
-        </p:txBody>
-      </p:sp>
-      <p:sp>
-        <p:nvSpPr>
-          <p:cNvPr id="547842" name="Content Placeholder 2"/>
-          <p:cNvSpPr>
-            <a:spLocks noGrp="1"/>
-          </p:cNvSpPr>
-          <p:nvPr>
-            <p:ph idx="1"/>
-          </p:nvPr>
-        </p:nvSpPr>
-        <p:spPr/>
-        <p:txBody>
-          <a:bodyPr>
-            <a:normAutofit lnSpcReduction="10000"/>
-          </a:bodyPr>
-          <a:lstStyle/>
-          <a:p>
-            <a:pPr>
-              <a:buFontTx/>
-              <a:buNone/>
-            </a:pPr>
-            <a:r>
-              <a:rPr lang="en-US" b="1" dirty="0"/>
-              <a:t>Suppose I have two French horn players both playing the same note at the same time.  I stand a meter away and find that they are each playing with an intensity of  0.00001 W/m</a:t>
-            </a:r>
-            <a:r>
-              <a:rPr lang="en-US" b="1" baseline="30000" dirty="0"/>
-              <a:t>2</a:t>
-            </a:r>
-            <a:r>
-              <a:rPr lang="en-US" b="1" dirty="0"/>
-              <a:t>. What is the sound level? </a:t>
-            </a:r>
-          </a:p>
-          <a:p>
-            <a:pPr>
-              <a:buFontTx/>
-              <a:buNone/>
-            </a:pPr>
-            <a:r>
-              <a:rPr lang="en-US" b="1" dirty="0"/>
-              <a:t>a) 0.00001</a:t>
-            </a:r>
-          </a:p>
-          <a:p>
-            <a:pPr>
-              <a:buFontTx/>
-              <a:buNone/>
-            </a:pPr>
-            <a:r>
-              <a:rPr lang="en-US" b="1" dirty="0"/>
-              <a:t>b) 70dB</a:t>
-            </a:r>
-          </a:p>
-          <a:p>
-            <a:pPr>
-              <a:buFontTx/>
-              <a:buNone/>
-            </a:pPr>
-            <a:r>
-              <a:rPr lang="en-US" b="1" dirty="0"/>
-              <a:t>c) 73dB</a:t>
-            </a:r>
-          </a:p>
-          <a:p>
-            <a:pPr>
-              <a:buFontTx/>
-              <a:buNone/>
-            </a:pPr>
-            <a:r>
-              <a:rPr lang="en-US" b="1" dirty="0"/>
-              <a:t>d) 1400dB</a:t>
-            </a:r>
-          </a:p>
-        </p:txBody>
-      </p:sp>
-    </p:spTree>
-    <p:extLst>
-      <p:ext uri="{BB962C8B-B14F-4D97-AF65-F5344CB8AC3E}">
-        <p14:creationId xmlns:p14="http://schemas.microsoft.com/office/powerpoint/2010/main" val="3235514585"/>
       </p:ext>
     </p:extLst>
   </p:cSld>
@@ -33787,6 +33785,134 @@
       </p:grpSpPr>
       <p:sp>
         <p:nvSpPr>
+          <p:cNvPr id="547841" name="Title 1"/>
+          <p:cNvSpPr>
+            <a:spLocks noGrp="1"/>
+          </p:cNvSpPr>
+          <p:nvPr>
+            <p:ph type="title"/>
+          </p:nvPr>
+        </p:nvSpPr>
+        <p:spPr/>
+        <p:txBody>
+          <a:bodyPr/>
+          <a:lstStyle/>
+          <a:p>
+            <a:r>
+              <a:rPr lang="en-US" dirty="0"/>
+              <a:t>Question 223.4.13 123.22.9</a:t>
+            </a:r>
+          </a:p>
+        </p:txBody>
+      </p:sp>
+      <p:sp>
+        <p:nvSpPr>
+          <p:cNvPr id="547842" name="Content Placeholder 2"/>
+          <p:cNvSpPr>
+            <a:spLocks noGrp="1"/>
+          </p:cNvSpPr>
+          <p:nvPr>
+            <p:ph idx="1"/>
+          </p:nvPr>
+        </p:nvSpPr>
+        <p:spPr/>
+        <p:txBody>
+          <a:bodyPr>
+            <a:normAutofit lnSpcReduction="10000"/>
+          </a:bodyPr>
+          <a:lstStyle/>
+          <a:p>
+            <a:pPr>
+              <a:buFontTx/>
+              <a:buNone/>
+            </a:pPr>
+            <a:r>
+              <a:rPr lang="en-US" b="1" dirty="0"/>
+              <a:t>Suppose I have two French horn players both playing the same note at the same time.  I stand a meter away and find that they are each playing with an intensity of  0.00001 W/m</a:t>
+            </a:r>
+            <a:r>
+              <a:rPr lang="en-US" b="1" baseline="30000" dirty="0"/>
+              <a:t>2</a:t>
+            </a:r>
+            <a:r>
+              <a:rPr lang="en-US" b="1" dirty="0"/>
+              <a:t>. What is the sound level? </a:t>
+            </a:r>
+          </a:p>
+          <a:p>
+            <a:pPr>
+              <a:buFontTx/>
+              <a:buNone/>
+            </a:pPr>
+            <a:r>
+              <a:rPr lang="en-US" b="1" dirty="0"/>
+              <a:t>a) 0.00001</a:t>
+            </a:r>
+          </a:p>
+          <a:p>
+            <a:pPr>
+              <a:buFontTx/>
+              <a:buNone/>
+            </a:pPr>
+            <a:r>
+              <a:rPr lang="en-US" b="1" dirty="0"/>
+              <a:t>b) 70dB</a:t>
+            </a:r>
+          </a:p>
+          <a:p>
+            <a:pPr>
+              <a:buFontTx/>
+              <a:buNone/>
+            </a:pPr>
+            <a:r>
+              <a:rPr lang="en-US" b="1" dirty="0"/>
+              <a:t>c) 73dB</a:t>
+            </a:r>
+          </a:p>
+          <a:p>
+            <a:pPr>
+              <a:buFontTx/>
+              <a:buNone/>
+            </a:pPr>
+            <a:r>
+              <a:rPr lang="en-US" b="1" dirty="0"/>
+              <a:t>d) 1400dB</a:t>
+            </a:r>
+          </a:p>
+        </p:txBody>
+      </p:sp>
+    </p:spTree>
+    <p:extLst>
+      <p:ext uri="{BB962C8B-B14F-4D97-AF65-F5344CB8AC3E}">
+        <p14:creationId xmlns:p14="http://schemas.microsoft.com/office/powerpoint/2010/main" val="3235514585"/>
+      </p:ext>
+    </p:extLst>
+  </p:cSld>
+  <p:clrMapOvr>
+    <a:masterClrMapping/>
+  </p:clrMapOvr>
+</p:sld>
+</file>
+
+<file path=ppt/slides/slide71.xml><?xml version="1.0" encoding="utf-8"?>
+<p:sld xmlns:a="http://schemas.openxmlformats.org/drawingml/2006/main" xmlns:r="http://schemas.openxmlformats.org/officeDocument/2006/relationships" xmlns:p="http://schemas.openxmlformats.org/presentationml/2006/main">
+  <p:cSld>
+    <p:spTree>
+      <p:nvGrpSpPr>
+        <p:cNvPr id="1" name=""/>
+        <p:cNvGrpSpPr/>
+        <p:nvPr/>
+      </p:nvGrpSpPr>
+      <p:grpSpPr>
+        <a:xfrm>
+          <a:off x="0" y="0"/>
+          <a:ext cx="0" cy="0"/>
+          <a:chOff x="0" y="0"/>
+          <a:chExt cx="0" cy="0"/>
+        </a:xfrm>
+      </p:grpSpPr>
+      <p:sp>
+        <p:nvSpPr>
           <p:cNvPr id="548865" name="Title 1"/>
           <p:cNvSpPr>
             <a:spLocks noGrp="1"/>
@@ -33890,7 +34016,7 @@
 </p:sld>
 </file>
 
-<file path=ppt/slides/slide71.xml><?xml version="1.0" encoding="utf-8"?>
+<file path=ppt/slides/slide72.xml><?xml version="1.0" encoding="utf-8"?>
 <p:sld xmlns:a="http://schemas.openxmlformats.org/drawingml/2006/main" xmlns:r="http://schemas.openxmlformats.org/officeDocument/2006/relationships" xmlns:p="http://schemas.openxmlformats.org/presentationml/2006/main">
   <p:cSld>
     <p:spTree>
@@ -34012,7 +34138,7 @@
 </p:sld>
 </file>
 
-<file path=ppt/slides/slide72.xml><?xml version="1.0" encoding="utf-8"?>
+<file path=ppt/slides/slide73.xml><?xml version="1.0" encoding="utf-8"?>
 <p:sld xmlns:a="http://schemas.openxmlformats.org/drawingml/2006/main" xmlns:r="http://schemas.openxmlformats.org/officeDocument/2006/relationships" xmlns:p="http://schemas.openxmlformats.org/presentationml/2006/main">
   <p:cSld>
     <p:spTree>
@@ -34132,7 +34258,7 @@
 </p:sld>
 </file>
 
-<file path=ppt/slides/slide73.xml><?xml version="1.0" encoding="utf-8"?>
+<file path=ppt/slides/slide74.xml><?xml version="1.0" encoding="utf-8"?>
 <p:sld xmlns:a="http://schemas.openxmlformats.org/drawingml/2006/main" xmlns:r="http://schemas.openxmlformats.org/officeDocument/2006/relationships" xmlns:p="http://schemas.openxmlformats.org/presentationml/2006/main">
   <p:cSld>
     <p:spTree>
@@ -34257,7 +34383,7 @@
 </p:sld>
 </file>
 
-<file path=ppt/slides/slide74.xml><?xml version="1.0" encoding="utf-8"?>
+<file path=ppt/slides/slide75.xml><?xml version="1.0" encoding="utf-8"?>
 <p:sld xmlns:a="http://schemas.openxmlformats.org/drawingml/2006/main" xmlns:r="http://schemas.openxmlformats.org/officeDocument/2006/relationships" xmlns:p="http://schemas.openxmlformats.org/presentationml/2006/main">
   <p:cSld>
     <p:spTree>
@@ -35316,7 +35442,7 @@
 </p:sld>
 </file>
 
-<file path=ppt/slides/slide75.xml><?xml version="1.0" encoding="utf-8"?>
+<file path=ppt/slides/slide76.xml><?xml version="1.0" encoding="utf-8"?>
 <p:sld xmlns:a="http://schemas.openxmlformats.org/drawingml/2006/main" xmlns:r="http://schemas.openxmlformats.org/officeDocument/2006/relationships" xmlns:p="http://schemas.openxmlformats.org/presentationml/2006/main">
   <p:cSld>
     <p:spTree>
@@ -35950,7 +36076,7 @@
 </p:sld>
 </file>
 
-<file path=ppt/slides/slide76.xml><?xml version="1.0" encoding="utf-8"?>
+<file path=ppt/slides/slide77.xml><?xml version="1.0" encoding="utf-8"?>
 <p:sld xmlns:a="http://schemas.openxmlformats.org/drawingml/2006/main" xmlns:r="http://schemas.openxmlformats.org/officeDocument/2006/relationships" xmlns:p="http://schemas.openxmlformats.org/presentationml/2006/main">
   <p:cSld>
     <p:spTree>
@@ -36359,7 +36485,7 @@
 </p:sld>
 </file>
 
-<file path=ppt/slides/slide77.xml><?xml version="1.0" encoding="utf-8"?>
+<file path=ppt/slides/slide78.xml><?xml version="1.0" encoding="utf-8"?>
 <p:sld xmlns:a="http://schemas.openxmlformats.org/drawingml/2006/main" xmlns:r="http://schemas.openxmlformats.org/officeDocument/2006/relationships" xmlns:p="http://schemas.openxmlformats.org/presentationml/2006/main">
   <p:cSld>
     <p:spTree>
@@ -36768,7 +36894,7 @@
 </p:sld>
 </file>
 
-<file path=ppt/slides/slide78.xml><?xml version="1.0" encoding="utf-8"?>
+<file path=ppt/slides/slide79.xml><?xml version="1.0" encoding="utf-8"?>
 <p:sld xmlns:a="http://schemas.openxmlformats.org/drawingml/2006/main" xmlns:r="http://schemas.openxmlformats.org/officeDocument/2006/relationships" xmlns:p="http://schemas.openxmlformats.org/presentationml/2006/main">
   <p:cSld>
     <p:spTree>
@@ -36920,7 +37046,7 @@
             <a:fld id="{23A722F0-04E0-4C85-BB4F-F38C170A22CE}" type="slidenum">
               <a:rPr lang="en-US" smtClean="0"/>
               <a:pPr/>
-              <a:t>78</a:t>
+              <a:t>79</a:t>
             </a:fld>
             <a:endParaRPr lang="en-US"/>
           </a:p>
@@ -36930,133 +37056,6 @@
     <p:extLst>
       <p:ext uri="{BB962C8B-B14F-4D97-AF65-F5344CB8AC3E}">
         <p14:creationId xmlns:p14="http://schemas.microsoft.com/office/powerpoint/2010/main" val="3674213391"/>
-      </p:ext>
-    </p:extLst>
-  </p:cSld>
-  <p:clrMapOvr>
-    <a:masterClrMapping/>
-  </p:clrMapOvr>
-</p:sld>
-</file>
-
-<file path=ppt/slides/slide79.xml><?xml version="1.0" encoding="utf-8"?>
-<p:sld xmlns:a="http://schemas.openxmlformats.org/drawingml/2006/main" xmlns:r="http://schemas.openxmlformats.org/officeDocument/2006/relationships" xmlns:p="http://schemas.openxmlformats.org/presentationml/2006/main">
-  <p:cSld>
-    <p:spTree>
-      <p:nvGrpSpPr>
-        <p:cNvPr id="1" name=""/>
-        <p:cNvGrpSpPr/>
-        <p:nvPr/>
-      </p:nvGrpSpPr>
-      <p:grpSpPr>
-        <a:xfrm>
-          <a:off x="0" y="0"/>
-          <a:ext cx="0" cy="0"/>
-          <a:chOff x="0" y="0"/>
-          <a:chExt cx="0" cy="0"/>
-        </a:xfrm>
-      </p:grpSpPr>
-      <p:sp>
-        <p:nvSpPr>
-          <p:cNvPr id="601089" name="Title 1"/>
-          <p:cNvSpPr>
-            <a:spLocks noGrp="1"/>
-          </p:cNvSpPr>
-          <p:nvPr>
-            <p:ph type="title"/>
-          </p:nvPr>
-        </p:nvSpPr>
-        <p:spPr/>
-        <p:txBody>
-          <a:bodyPr>
-            <a:normAutofit fontScale="90000"/>
-          </a:bodyPr>
-          <a:lstStyle/>
-          <a:p>
-            <a:r>
-              <a:rPr lang="en-US" dirty="0"/>
-              <a:t>Question 223.5.3 Question 123.22.15</a:t>
-            </a:r>
-          </a:p>
-        </p:txBody>
-      </p:sp>
-      <p:sp>
-        <p:nvSpPr>
-          <p:cNvPr id="3" name="Content Placeholder 2"/>
-          <p:cNvSpPr>
-            <a:spLocks noGrp="1"/>
-          </p:cNvSpPr>
-          <p:nvPr>
-            <p:ph idx="1"/>
-          </p:nvPr>
-        </p:nvSpPr>
-        <p:spPr/>
-        <p:txBody>
-          <a:bodyPr>
-            <a:normAutofit lnSpcReduction="10000"/>
-          </a:bodyPr>
-          <a:lstStyle/>
-          <a:p>
-            <a:pPr>
-              <a:buFontTx/>
-              <a:buNone/>
-              <a:defRPr/>
-            </a:pPr>
-            <a:r>
-              <a:rPr lang="en-US" dirty="0"/>
-              <a:t>You are sitting on the Hogwarts Express. It  is just leaving the station. The whistle blows. The engineer (if there is one) hears a perfect middle C (256 Hz). What do you hear as the train leaves?</a:t>
-            </a:r>
-          </a:p>
-          <a:p>
-            <a:pPr marL="514350" indent="-514350">
-              <a:buFontTx/>
-              <a:buAutoNum type="alphaLcParenR"/>
-              <a:defRPr/>
-            </a:pPr>
-            <a:r>
-              <a:rPr lang="en-US" dirty="0"/>
-              <a:t>A higher pitch than 256 Hz</a:t>
-            </a:r>
-          </a:p>
-          <a:p>
-            <a:pPr marL="514350" indent="-514350">
-              <a:buFontTx/>
-              <a:buAutoNum type="alphaLcParenR"/>
-              <a:defRPr/>
-            </a:pPr>
-            <a:r>
-              <a:rPr lang="en-US" dirty="0"/>
-              <a:t>A lower pitch than 256 Hz</a:t>
-            </a:r>
-          </a:p>
-          <a:p>
-            <a:pPr marL="514350" indent="-514350">
-              <a:buFontTx/>
-              <a:buAutoNum type="alphaLcParenR"/>
-              <a:defRPr/>
-            </a:pPr>
-            <a:r>
-              <a:rPr lang="en-US" dirty="0"/>
-              <a:t>Middle C (256 Hz)</a:t>
-            </a:r>
-          </a:p>
-          <a:p>
-            <a:pPr marL="514350" indent="-514350">
-              <a:buFontTx/>
-              <a:buAutoNum type="alphaLcParenR"/>
-              <a:defRPr/>
-            </a:pPr>
-            <a:r>
-              <a:rPr lang="en-US" dirty="0"/>
-              <a:t>Nothing</a:t>
-            </a:r>
-          </a:p>
-        </p:txBody>
-      </p:sp>
-    </p:spTree>
-    <p:extLst>
-      <p:ext uri="{BB962C8B-B14F-4D97-AF65-F5344CB8AC3E}">
-        <p14:creationId xmlns:p14="http://schemas.microsoft.com/office/powerpoint/2010/main" val="2918768208"/>
       </p:ext>
     </p:extLst>
   </p:cSld>
@@ -37713,6 +37712,133 @@
       </p:grpSpPr>
       <p:sp>
         <p:nvSpPr>
+          <p:cNvPr id="601089" name="Title 1"/>
+          <p:cNvSpPr>
+            <a:spLocks noGrp="1"/>
+          </p:cNvSpPr>
+          <p:nvPr>
+            <p:ph type="title"/>
+          </p:nvPr>
+        </p:nvSpPr>
+        <p:spPr/>
+        <p:txBody>
+          <a:bodyPr>
+            <a:normAutofit fontScale="90000"/>
+          </a:bodyPr>
+          <a:lstStyle/>
+          <a:p>
+            <a:r>
+              <a:rPr lang="en-US" dirty="0"/>
+              <a:t>Question 223.5.3 Question 123.22.15</a:t>
+            </a:r>
+          </a:p>
+        </p:txBody>
+      </p:sp>
+      <p:sp>
+        <p:nvSpPr>
+          <p:cNvPr id="3" name="Content Placeholder 2"/>
+          <p:cNvSpPr>
+            <a:spLocks noGrp="1"/>
+          </p:cNvSpPr>
+          <p:nvPr>
+            <p:ph idx="1"/>
+          </p:nvPr>
+        </p:nvSpPr>
+        <p:spPr/>
+        <p:txBody>
+          <a:bodyPr>
+            <a:normAutofit lnSpcReduction="10000"/>
+          </a:bodyPr>
+          <a:lstStyle/>
+          <a:p>
+            <a:pPr>
+              <a:buFontTx/>
+              <a:buNone/>
+              <a:defRPr/>
+            </a:pPr>
+            <a:r>
+              <a:rPr lang="en-US" dirty="0"/>
+              <a:t>You are sitting on the Hogwarts Express. It  is just leaving the station. The whistle blows. The engineer (if there is one) hears a perfect middle C (256 Hz). What do you hear as the train leaves?</a:t>
+            </a:r>
+          </a:p>
+          <a:p>
+            <a:pPr marL="514350" indent="-514350">
+              <a:buFontTx/>
+              <a:buAutoNum type="alphaLcParenR"/>
+              <a:defRPr/>
+            </a:pPr>
+            <a:r>
+              <a:rPr lang="en-US" dirty="0"/>
+              <a:t>A higher pitch than 256 Hz</a:t>
+            </a:r>
+          </a:p>
+          <a:p>
+            <a:pPr marL="514350" indent="-514350">
+              <a:buFontTx/>
+              <a:buAutoNum type="alphaLcParenR"/>
+              <a:defRPr/>
+            </a:pPr>
+            <a:r>
+              <a:rPr lang="en-US" dirty="0"/>
+              <a:t>A lower pitch than 256 Hz</a:t>
+            </a:r>
+          </a:p>
+          <a:p>
+            <a:pPr marL="514350" indent="-514350">
+              <a:buFontTx/>
+              <a:buAutoNum type="alphaLcParenR"/>
+              <a:defRPr/>
+            </a:pPr>
+            <a:r>
+              <a:rPr lang="en-US" dirty="0"/>
+              <a:t>Middle C (256 Hz)</a:t>
+            </a:r>
+          </a:p>
+          <a:p>
+            <a:pPr marL="514350" indent="-514350">
+              <a:buFontTx/>
+              <a:buAutoNum type="alphaLcParenR"/>
+              <a:defRPr/>
+            </a:pPr>
+            <a:r>
+              <a:rPr lang="en-US" dirty="0"/>
+              <a:t>Nothing</a:t>
+            </a:r>
+          </a:p>
+        </p:txBody>
+      </p:sp>
+    </p:spTree>
+    <p:extLst>
+      <p:ext uri="{BB962C8B-B14F-4D97-AF65-F5344CB8AC3E}">
+        <p14:creationId xmlns:p14="http://schemas.microsoft.com/office/powerpoint/2010/main" val="2918768208"/>
+      </p:ext>
+    </p:extLst>
+  </p:cSld>
+  <p:clrMapOvr>
+    <a:masterClrMapping/>
+  </p:clrMapOvr>
+</p:sld>
+</file>
+
+<file path=ppt/slides/slide81.xml><?xml version="1.0" encoding="utf-8"?>
+<p:sld xmlns:a="http://schemas.openxmlformats.org/drawingml/2006/main" xmlns:r="http://schemas.openxmlformats.org/officeDocument/2006/relationships" xmlns:p="http://schemas.openxmlformats.org/presentationml/2006/main">
+  <p:cSld>
+    <p:spTree>
+      <p:nvGrpSpPr>
+        <p:cNvPr id="1" name=""/>
+        <p:cNvGrpSpPr/>
+        <p:nvPr/>
+      </p:nvGrpSpPr>
+      <p:grpSpPr>
+        <a:xfrm>
+          <a:off x="0" y="0"/>
+          <a:ext cx="0" cy="0"/>
+          <a:chOff x="0" y="0"/>
+          <a:chExt cx="0" cy="0"/>
+        </a:xfrm>
+      </p:grpSpPr>
+      <p:sp>
+        <p:nvSpPr>
           <p:cNvPr id="69635" name="Rectangle 2"/>
           <p:cNvSpPr>
             <a:spLocks noGrp="1" noChangeArrowheads="1"/>
@@ -37822,7 +37948,7 @@
             <a:fld id="{0444647A-B62D-46AC-8BB6-871103D5B2E6}" type="slidenum">
               <a:rPr lang="en-US" smtClean="0"/>
               <a:pPr/>
-              <a:t>80</a:t>
+              <a:t>81</a:t>
             </a:fld>
             <a:endParaRPr lang="en-US"/>
           </a:p>
@@ -37841,7 +37967,7 @@
 </p:sld>
 </file>
 
-<file path=ppt/slides/slide81.xml><?xml version="1.0" encoding="utf-8"?>
+<file path=ppt/slides/slide82.xml><?xml version="1.0" encoding="utf-8"?>
 <p:sld xmlns:a="http://schemas.openxmlformats.org/drawingml/2006/main" xmlns:r="http://schemas.openxmlformats.org/officeDocument/2006/relationships" xmlns:p="http://schemas.openxmlformats.org/presentationml/2006/main">
   <p:cSld>
     <p:spTree>
@@ -37970,7 +38096,7 @@
               <a:pPr>
                 <a:defRPr/>
               </a:pPr>
-              <a:t>81</a:t>
+              <a:t>82</a:t>
             </a:fld>
             <a:endParaRPr lang="en-US"/>
           </a:p>
@@ -37989,7 +38115,7 @@
 </p:sld>
 </file>
 
-<file path=ppt/slides/slide82.xml><?xml version="1.0" encoding="utf-8"?>
+<file path=ppt/slides/slide83.xml><?xml version="1.0" encoding="utf-8"?>
 <p:sld xmlns:a="http://schemas.openxmlformats.org/drawingml/2006/main" xmlns:r="http://schemas.openxmlformats.org/officeDocument/2006/relationships" xmlns:p="http://schemas.openxmlformats.org/presentationml/2006/main">
   <p:cSld>
     <p:spTree>
@@ -39379,7 +39505,7 @@
 </p:sld>
 </file>
 
-<file path=ppt/slides/slide83.xml><?xml version="1.0" encoding="utf-8"?>
+<file path=ppt/slides/slide84.xml><?xml version="1.0" encoding="utf-8"?>
 <p:sld xmlns:a="http://schemas.openxmlformats.org/drawingml/2006/main" xmlns:r="http://schemas.openxmlformats.org/officeDocument/2006/relationships" xmlns:p="http://schemas.openxmlformats.org/presentationml/2006/main">
   <p:cSld>
     <p:spTree>
@@ -39448,7 +39574,7 @@
 </p:sld>
 </file>
 
-<file path=ppt/slides/slide84.xml><?xml version="1.0" encoding="utf-8"?>
+<file path=ppt/slides/slide85.xml><?xml version="1.0" encoding="utf-8"?>
 <p:sld xmlns:a="http://schemas.openxmlformats.org/drawingml/2006/main" xmlns:r="http://schemas.openxmlformats.org/officeDocument/2006/relationships" xmlns:p="http://schemas.openxmlformats.org/presentationml/2006/main">
   <p:cSld>
     <p:spTree>
@@ -39557,7 +39683,7 @@
 </p:sld>
 </file>
 
-<file path=ppt/slides/slide85.xml><?xml version="1.0" encoding="utf-8"?>
+<file path=ppt/slides/slide86.xml><?xml version="1.0" encoding="utf-8"?>
 <p:sld xmlns:a="http://schemas.openxmlformats.org/drawingml/2006/main" xmlns:r="http://schemas.openxmlformats.org/officeDocument/2006/relationships" xmlns:p="http://schemas.openxmlformats.org/presentationml/2006/main">
   <p:cSld>
     <p:spTree>
@@ -39613,7 +39739,7 @@
 </p:sld>
 </file>
 
-<file path=ppt/slides/slide86.xml><?xml version="1.0" encoding="utf-8"?>
+<file path=ppt/slides/slide87.xml><?xml version="1.0" encoding="utf-8"?>
 <p:sld xmlns:a="http://schemas.openxmlformats.org/drawingml/2006/main" xmlns:r="http://schemas.openxmlformats.org/officeDocument/2006/relationships" xmlns:p="http://schemas.openxmlformats.org/presentationml/2006/main">
   <p:cSld>
     <p:spTree>
@@ -39733,7 +39859,7 @@
 </p:sld>
 </file>
 
-<file path=ppt/slides/slide87.xml><?xml version="1.0" encoding="utf-8"?>
+<file path=ppt/slides/slide88.xml><?xml version="1.0" encoding="utf-8"?>
 <p:sld xmlns:a="http://schemas.openxmlformats.org/drawingml/2006/main" xmlns:r="http://schemas.openxmlformats.org/officeDocument/2006/relationships" xmlns:p="http://schemas.openxmlformats.org/presentationml/2006/main">
   <p:cSld>
     <p:spTree>
@@ -39857,7 +39983,7 @@
 </p:sld>
 </file>
 
-<file path=ppt/slides/slide88.xml><?xml version="1.0" encoding="utf-8"?>
+<file path=ppt/slides/slide89.xml><?xml version="1.0" encoding="utf-8"?>
 <p:sld xmlns:a="http://schemas.openxmlformats.org/drawingml/2006/main" xmlns:r="http://schemas.openxmlformats.org/officeDocument/2006/relationships" xmlns:p="http://schemas.openxmlformats.org/presentationml/2006/main">
   <p:cSld>
     <p:spTree>
